--- a/en/slides/20-Computer_Architecture-Video_Card.pptx
+++ b/en/slides/20-Computer_Architecture-Video_Card.pptx
@@ -126,26 +126,26 @@
   <p:extLst>
     <p:ext uri="{521415D9-36F7-43E2-AB2F-B90AF26B5E84}">
       <p14:sectionLst xmlns:p14="http://schemas.microsoft.com/office/powerpoint/2010/main">
-        <p14:section name="Opening" id="{21bf0ef1-2836-3146-c561-a5b9fe928d19}">
+        <p14:section name="Opening" id="{ca757b33-3cc8-54ca-1a54-e039c6669774}">
           <p14:sldIdLst>
             <p14:sldId id="256"/>
             <p14:sldId id="257"/>
           </p14:sldIdLst>
         </p14:section>
-        <p14:section name="Peripherals and controllers" id="{3a530678-8fc2-bfe2-1a30-39aabe8a4ed8}">
+        <p14:section name="Peripherals and controllers" id="{9a97d427-3b1f-0a22-1a65-ad5795b478b5}">
           <p14:sldIdLst>
             <p14:sldId id="258"/>
             <p14:sldId id="259"/>
           </p14:sldIdLst>
         </p14:section>
-        <p14:section name="Buses" id="{4b2e2679-389c-8340-ff50-240be0d82a41}">
+        <p14:section name="Buses" id="{8d2a0975-1f26-9954-579a-d00c88d4e50f}">
           <p14:sldIdLst>
             <p14:sldId id="260"/>
             <p14:sldId id="261"/>
             <p14:sldId id="262"/>
           </p14:sldIdLst>
         </p14:section>
-        <p14:section name="The video card" id="{d8f7662b-a1e4-119c-3d12-beab94243f16}">
+        <p14:section name="The video card" id="{73674b0d-dd3c-a888-e07c-945b964f3196}">
           <p14:sldIdLst>
             <p14:sldId id="263"/>
             <p14:sldId id="264"/>
@@ -156,7 +156,7 @@
             <p14:sldId id="269"/>
           </p14:sldIdLst>
         </p14:section>
-        <p14:section name="GPU and GPGPU" id="{2a5b85da-b700-94ec-6ccc-6fdfd165a814}">
+        <p14:section name="GPU and GPGPU" id="{397f4559-adde-dccb-1644-dcdbe3eb8c68}">
           <p14:sldIdLst>
             <p14:sldId id="270"/>
             <p14:sldId id="271"/>
@@ -3293,7 +3293,63 @@
       </p:sp>
       <p:sp>
         <p:nvSpPr>
-          <p:cNvPr id="12" name="Shape 10"/>
+          <p:cNvPr id="12" name="Text 10"/>
+          <p:cNvSpPr txBox="1"/>
+          <p:nvPr/>
+        </p:nvSpPr>
+        <p:spPr>
+          <a:xfrm>
+            <a:off x="4693615" y="566928"/>
+            <a:ext cx="6949440" cy="640080"/>
+          </a:xfrm>
+          <a:prstGeom prst="rect">
+            <a:avLst/>
+          </a:prstGeom>
+          <a:noFill/>
+          <a:ln/>
+        </p:spPr>
+        <p:txBody>
+          <a:bodyPr wrap="square" lIns="0" tIns="0" rIns="0" bIns="0" rtlCol="0" anchor="t"/>
+          <a:lstStyle/>
+          <a:p>
+            <a:pPr algn="r" indent="0" marL="0">
+              <a:buNone/>
+            </a:pPr>
+            <a:r>
+              <a:rPr lang="en-US" sz="1300" dirty="0">
+                <a:solidFill>
+                  <a:srgbClr val="CFE3EA"/>
+                </a:solidFill>
+                <a:latin typeface="Calibri" pitchFamily="34" charset="0"/>
+                <a:ea typeface="Calibri" pitchFamily="34" charset="-122"/>
+                <a:cs typeface="Calibri" pitchFamily="34" charset="-120"/>
+              </a:rPr>
+              <a:t>Lecture deck. The listings, the complete program and how to test it are in the code deck:</a:t>
+            </a:r>
+            <a:endParaRPr lang="en-US" sz="1300" dirty="0"/>
+          </a:p>
+          <a:p>
+            <a:pPr algn="r" indent="0" marL="0">
+              <a:buNone/>
+            </a:pPr>
+            <a:r>
+              <a:rPr lang="en-US" sz="1300" dirty="0">
+                <a:solidFill>
+                  <a:srgbClr val="CFE3EA"/>
+                </a:solidFill>
+                <a:latin typeface="Calibri" pitchFamily="34" charset="0"/>
+                <a:ea typeface="Calibri" pitchFamily="34" charset="-122"/>
+                <a:cs typeface="Calibri" pitchFamily="34" charset="-120"/>
+              </a:rPr>
+              <a:t>20-Computer_Architecture-Video_Card-Code.pptx</a:t>
+            </a:r>
+            <a:endParaRPr lang="en-US" sz="1300" dirty="0"/>
+          </a:p>
+        </p:txBody>
+      </p:sp>
+      <p:sp>
+        <p:nvSpPr>
+          <p:cNvPr id="13" name="Shape 11"/>
           <p:cNvSpPr/>
           <p:nvPr/>
         </p:nvSpPr>
@@ -3320,7 +3376,7 @@
       </p:sp>
       <p:pic>
         <p:nvPicPr>
-          <p:cNvPr id="13" name="Image 0" descr="/Users/raffaelemontella/devel/riscv-prg32/computer-architecture-with-prg32/tools/assets/game_raycaster.png">    </p:cNvPr>
+          <p:cNvPr id="14" name="Image 0" descr="/Users/raffaelemontella/devel/riscv-prg32/computer-architecture-with-prg32/tools/assets/game_raycaster.png">    </p:cNvPr>
           <p:cNvPicPr>
             <a:picLocks noChangeAspect="1"/>
           </p:cNvPicPr>
@@ -11445,8 +11501,8 @@
         </p:blipFill>
         <p:spPr>
           <a:xfrm>
-            <a:off x="6766560" y="2048154"/>
-            <a:ext cx="4876495" cy="3036012"/>
+            <a:off x="6766560" y="2265761"/>
+            <a:ext cx="4876495" cy="2600797"/>
           </a:xfrm>
           <a:prstGeom prst="rect">
             <a:avLst/>

--- a/en/slides/20-Computer_Architecture-Video_Card.pptx
+++ b/en/slides/20-Computer_Architecture-Video_Card.pptx
@@ -126,26 +126,26 @@
   <p:extLst>
     <p:ext uri="{521415D9-36F7-43E2-AB2F-B90AF26B5E84}">
       <p14:sectionLst xmlns:p14="http://schemas.microsoft.com/office/powerpoint/2010/main">
-        <p14:section name="Opening" id="{ca757b33-3cc8-54ca-1a54-e039c6669774}">
+        <p14:section name="Opening" id="{c22efe62-7aa1-dbcf-48c2-7b483619461f}">
           <p14:sldIdLst>
             <p14:sldId id="256"/>
             <p14:sldId id="257"/>
           </p14:sldIdLst>
         </p14:section>
-        <p14:section name="Peripherals and controllers" id="{9a97d427-3b1f-0a22-1a65-ad5795b478b5}">
+        <p14:section name="Peripherals and controllers" id="{02706fb6-11d4-8c24-2c9a-2013aae7ecc5}">
           <p14:sldIdLst>
             <p14:sldId id="258"/>
             <p14:sldId id="259"/>
           </p14:sldIdLst>
         </p14:section>
-        <p14:section name="Buses" id="{8d2a0975-1f26-9954-579a-d00c88d4e50f}">
+        <p14:section name="Buses" id="{1c22d38e-5795-7c39-b6e0-48528171e6b5}">
           <p14:sldIdLst>
             <p14:sldId id="260"/>
             <p14:sldId id="261"/>
             <p14:sldId id="262"/>
           </p14:sldIdLst>
         </p14:section>
-        <p14:section name="The video card" id="{73674b0d-dd3c-a888-e07c-945b964f3196}">
+        <p14:section name="The video card" id="{d1140f6b-ef81-5cf8-d843-af225611711e}">
           <p14:sldIdLst>
             <p14:sldId id="263"/>
             <p14:sldId id="264"/>
@@ -156,7 +156,7 @@
             <p14:sldId id="269"/>
           </p14:sldIdLst>
         </p14:section>
-        <p14:section name="GPU and GPGPU" id="{397f4559-adde-dccb-1644-dcdbe3eb8c68}">
+        <p14:section name="GPU and GPGPU" id="{590b0f1b-5135-1fa7-a58e-7ea32c9658ee}">
           <p14:sldIdLst>
             <p14:sldId id="270"/>
             <p14:sldId id="271"/>
@@ -571,6 +571,8 @@
             <a:r>
               <a:rPr lang="en-US" dirty="0"/>
               <a:t>With this lecture the course leaves the processor and turns to what surrounds it. The subject is the path of an image: from a number in memory to a point of light on the screen. On the way you meet two general ideas, the controller of a peripheral and the bus, and one specific machine, the video card, with its processor, the GPU. The kit has no video card at all, and this is an advantage: every step that a card would hide is done by code you can read.
+Learning status: UNDERSTAND NOW, by the end of this lecture you explain it, trace it and apply it on your own; USE NOW, you follow and use the recipe today; how it works inside is explained later, or is not part of the course; UNDERSTAND LATER, recognise the name and what it is for; a later lecture explains it. A slide without a badge is context: a story, an example, a question, an exercise.
+Learning status of this lecture. UNDERSTAND NOW: the frame buffer; device controllers; buses and bandwidth; the video card; GPU and GPGPU. USE NOW: the complete program, the PRG32 tools (used, not studied, in this course). UNDERSTAND LATER: nothing. A slide without a badge is context: a story, an example, a question, an exercise.
 For the lecturer: Spiral: one call draws one pixel on PRG32; the lecture follows that pixel from the frame buffer to the display, then generalises to buses, video cards, GPUs and GPGPU. The kit has no video card: its processor does everything, which makes every step visible.</a:t>
             </a:r>
             <a:endParaRPr lang="en-US" dirty="0"/>
@@ -660,6 +662,7 @@
             <a:r>
               <a:rPr lang="en-US" dirty="0"/>
               <a:t>The outputs, in order of time. VGA, analogue, for cathode-ray monitors. DVI, the first digital output, which arrived with LCD monitors. HDMI, digital, which also carries audio. DisplayPort, digital, which also travels on USB-C connectors. The last row is the kit: the display is reached over an SPI bus, and the chip on the display module, an ILI9341, plays the part of the monitor's electronics for a panel of 320 by 240 pixels.
+UNDERSTAND NOW: the video card.
 For the lecturer: High-Definition Multimedia Interface; Digital Visual Interface; Video Graphics Array. The ILI9341 is the chip on the display module: it has its own memory for the frame and drives the liquid crystals (Lecture 21).</a:t>
             </a:r>
             <a:endParaRPr lang="en-US" dirty="0"/>
@@ -749,6 +752,7 @@
             <a:r>
               <a:rPr lang="en-US" dirty="0"/>
               <a:t>Resolution is the size of the grid of pixels, columns by rows. The table goes from 320 by 200, 64,000 pixels, the resolution of the Commodore 64 and of the PRG32 viewport, to 4K with more than eight million. The third column is the aspect ratio: the traditional 4:3 has given way to 16:9. Resolution determines the definition of the image, and also how many pixels must be stored and sent for every frame.
+UNDERSTAND NOW: the video card.
 For the lecturer: The table of the original deck also listed 800 x 600, 1280 x 1024 (5:4) and 1600 x 1200. The traditional 4:3 ratio has given way to the panoramic 16:9. The 4K row is new.</a:t>
             </a:r>
             <a:endParaRPr lang="en-US" dirty="0"/>
@@ -838,6 +842,7 @@
             <a:r>
               <a:rPr lang="en-US" dirty="0"/>
               <a:t>Colour depth is the number of bits per pixel. With 4 bits there are 16 colours; with 8 bits, 256, and each value is usually an index into a table of colours, the palette; with 16 bits, 65,536, in the RGB565 format you know; with 24 bits, more than sixteen million, 256 shades for each primary. Memory for a frame is pixels times bytes per pixel. PRG32 uses the two middle rows together: an 8-bit frame buffer of indices and a palette of 256 RGB565 colours.
+UNDERSTAND NOW: the video card.
 For the lecturer: In True Color every colour is obtained from 256 shades of each of the three additive primaries. PRG32 uses both middle rows: an 8-bit frame buffer of palette indices, and a palette of 256 RGB565 colours (Lecture 04).</a:t>
             </a:r>
             <a:endParaRPr lang="en-US" dirty="0"/>
@@ -927,6 +932,7 @@
             <a:r>
               <a:rPr lang="en-US" dirty="0"/>
               <a:t>The path of the pixel on the kit, in five boxes: your code, the frame buffer in RAM, the palette that turns an index into a colour, the SPI bus, the display. The table does the arithmetic. One frame at one byte per pixel is 64,000 bytes; at two bytes it would be a quarter of the chip's RAM. On the bus each pixel travels as 16 bits: about a million bits per frame, 38 milliseconds at 27 MHz. Hence the two engineering answers: an indexed frame buffer, and sending only what changed.
+UNDERSTAND NOW: the frame buffer.
 For the lecturer: Figures from the PRG32 repository (docs/hardware/ili9341.md): 64,000-byte 8-bit indexed frame buffer, 512-byte palette, default SPI clock of 27 MHz, DMA transfers and dirty-rectangle tracking. 1,024,000 / 27,000,000 = 37.9 ms. The FPS counter of the demo cartridges shows the result.</a:t>
             </a:r>
             <a:endParaRPr lang="en-US" dirty="0"/>
@@ -1016,6 +1022,7 @@
             <a:r>
               <a:rPr lang="en-US" dirty="0"/>
               <a:t>The same arithmetic, at the scale of a PC, explains the history of video hardware. More definition means more memory for each frame, and the flow of data towards the card risks saturating the bus. The two answers were more memory on the card itself, and a wider or dedicated bus: AGP first, PCI Express today. The figure on the right gives the scale: a 4K screen at 60 frames per second is about one and a half gigabytes of pixels every second.
+UNDERSTAND NOW: the video card.
 For the lecturer: With AGP the graphics processor used part of the main memory through direct access. PCI Express (2004) replaced it with more bandwidth and more power. SLI (NVIDIA) and CrossFire (AMD) linked up to four cards; today a single card, or many cards in a server, are the rule.</a:t>
             </a:r>
             <a:endParaRPr lang="en-US" dirty="0"/>
@@ -1105,6 +1112,7 @@
             <a:r>
               <a:rPr lang="en-US" dirty="0"/>
               <a:t>As graphical interfaces spread, computing images took a growing share of processor time. To relieve the CPU, video cards received dedicated processors: graphics processing units. They accelerate raster operations, such as copying blocks of pixels, and 3D graphics: transformations, textures, lighting. Programs reach them through libraries, and a device driver adapts the software to the primitives of each GPU. On the kit there is no GPU: a rectangle is a loop of stores executed by the RISC-V core, and you can see its cost.
+UNDERSTAND NOW: GPU and GPGPU.
 For the lecturer: On PRG32 there is no GPU: prg32_gfx_rect is a loop of store instructions executed by the RISC-V core. This is why the frame rate of a busy cartridge drops, and why the students can see the cost of every pixel.</a:t>
             </a:r>
             <a:endParaRPr lang="en-US" dirty="0"/>
@@ -1194,6 +1202,7 @@
             <a:r>
               <a:rPr lang="en-US" dirty="0"/>
               <a:t>A GPU applies the same operation, in parallel, to whole matrices of pixels. Nothing obliges those numbers to be pixels: GPGPU is the use of graphics processors for general computation. A GPU has a very large number of simple cores, and is programmed with models such as CUDA and OpenCL. Scientific simulation, data analysis and, above all today, the training and use of neural networks run on GPUs. The picture recalls the parallel sum of Lecture 04: the same operation on many data at once.
+UNDERSTAND NOW: GPU and GPGPU.
 For the lecturer: Compute Unified Device Architecture. The parallel sum of Lecture 04 is the simplest GPGPU example. The weather and marine models of the Department run on GPU clusters.</a:t>
             </a:r>
             <a:endParaRPr lang="en-US" dirty="0"/>
@@ -1641,6 +1650,7 @@
             <a:r>
               <a:rPr lang="en-US" dirty="0"/>
               <a:t>Five conclusions. Input/output devices are a fundamental part of a computer. Each is managed by a controller that interfaces it to the bus. A bus is characterised by width, speed and transfer rate, and its bandwidth is a limit to design around. A video card displays graphics and text: a frame buffer, a resolution, a colour depth, an output. And its processors, the GPUs, are used today for high-performance computing. The next lecture covers the other devices of input and output.
+Learning status, recap. UNDERSTAND NOW: the frame buffer; device controllers; buses and bandwidth; the video card; GPU and GPGPU. USE NOW: the complete program, the PRG32 tools (used, not studied, in this course). UNDERSTAND LATER: nothing. A slide without a badge is context: a story, an example, a question, an exercise.
 For the lecturer: Next lecture: input and output devices.</a:t>
             </a:r>
             <a:endParaRPr lang="en-US" dirty="0"/>
@@ -1730,6 +1740,7 @@
             <a:r>
               <a:rPr lang="en-US" dirty="0"/>
               <a:t>Peripherals serve the interaction between the user and the system. They have limited autonomy: the processor controls and coordinates them. And they work asynchronously, at their own pace, so mechanisms of synchronisation are needed: to know when an input datum is available, and when an output device has finished. The terminal, the most common instrument of interaction, is really two independent devices, a keyboard and a video; it is the processor that copies to the video what arrives from the keyboard.
+UNDERSTAND NOW: device controllers.
 For the lecturer: Keyboard and video are not directly connected: the processor reproduces on the video what arrives from the keyboard (Lecture 21).</a:t>
             </a:r>
             <a:endParaRPr lang="en-US" dirty="0"/>
@@ -1819,6 +1830,7 @@
             <a:r>
               <a:rPr lang="en-US" dirty="0"/>
               <a:t>A peripheral is never connected to the processor directly: between them is a controller. Look at the diagram: the processor and the memory are on the bus, and so are the controllers; each controller has its device on the other side. The controller manages the dialogue with the device and presents a few registers on the bus, which the processor reads and writes like memory. When an operation ends it usually raises an interrupt, as in the previous lecture. The video card is the controller of the monitor.
+UNDERSTAND NOW: device controllers.
 For the lecturer: On the ESP32-C6 the controllers (SPI, I2S, GPIO, USB) are on the same chip as the processor, and their registers are memory-mapped (Lecture 15).</a:t>
             </a:r>
             <a:endParaRPr lang="en-US" dirty="0"/>
@@ -1908,6 +1920,7 @@
             <a:r>
               <a:rPr lang="en-US" dirty="0"/>
               <a:t>A bus is a communication channel shared by several units, and its characteristics decide the performance of the whole system. Its width is the number of bits of the data bus. Its speed is the frequency at which it works. Their product is the transfer rate: a 32-bit bus at 66 MHz carries 4 bytes 66 million times per second, 264 megabytes per second. A bus is also a standard: signals, connectors and a protocol on which all the units agree.
+UNDERSTAND NOW: buses and bandwidth.
 For the lecturer: The example is the PCI bus: 4 bytes x 66 million cycles per second = 264 MB/s. Interface: the hardware module that encodes the data electrically or optically. Protocol: the higher-level description of how the dialogue takes place.</a:t>
             </a:r>
             <a:endParaRPr lang="en-US" dirty="0"/>
@@ -1996,7 +2009,8 @@
           <a:p>
             <a:r>
               <a:rPr lang="en-US" dirty="0"/>
-              <a:t>Why buses, and what they cost. The advantages: new devices are added easily; a peripheral can move to another computer with the same bus; one set of wires connects many peripherals; the cost per byte is low. The disadvantages: the bandwidth of the bus limits the transfer speed; the maximum speed falls as the bus gets longer and as more devices are attached; and, being shared, the bus carries only one transfer at a time.</a:t>
+              <a:t>Why buses, and what they cost. The advantages: new devices are added easily; a peripheral can move to another computer with the same bus; one set of wires connects many peripherals; the cost per byte is low. The disadvantages: the bandwidth of the bus limits the transfer speed; the maximum speed falls as the bus gets longer and as more devices are attached; and, being shared, the bus carries only one transfer at a time.
+UNDERSTAND NOW: buses and bandwidth.</a:t>
             </a:r>
             <a:endParaRPr lang="en-US" dirty="0"/>
           </a:p>
@@ -2085,6 +2099,7 @@
             <a:r>
               <a:rPr lang="en-US" dirty="0"/>
               <a:t>Forty years of buses in one table. Read it by columns. The early buses, ISA, PCI, AGP for the video card alone, IDE and SCSI for disks, were parallel: many wires side by side. Their successors, PCI Express, Serial ATA, USB, are serial: few wires, much faster. It is the lesson of Lecture 14. The last row is the kit: SPI, I2C and I2S are the small serial buses that connect chips on the same board.
+UNDERSTAND NOW: buses and bandwidth.
 For the lecturer: USB: universal serial bus. PCI: peripheral component interconnect. AGP: accelerated graphics port. IDE: integrated device electronics. ISA: industry standard architecture. SCSI: small computer system interface. PCMCIA and FireWire were in the original list. The move from parallel to serial is the lesson of Lecture 14.</a:t>
             </a:r>
             <a:endParaRPr lang="en-US" dirty="0"/>
@@ -2174,6 +2189,7 @@
             <a:r>
               <a:rPr lang="en-US" dirty="0"/>
               <a:t>The function of a video card is to send the monitor the information to display. It translates the representation of the image that the processor produces into a form the monitor can show. It has memory of its own, the video memory, which holds the frame: the frame buffer. Every time the screen is redrawn, the card reads that memory and sends the signal for the colour of each pixel. And it has its own processing capability, which the last part of the lecture examines.
+UNDERSTAND NOW: the video card.
 For the lecturer: DAC: digital-to-analogue converter, needed for analogue monitors. On PRG32 the 'video card' is a region of RAM plus the SPI peripheral: no separate hardware at all.</a:t>
             </a:r>
             <a:endParaRPr lang="en-US" dirty="0"/>
@@ -2263,6 +2279,7 @@
             <a:r>
               <a:rPr lang="en-US" dirty="0"/>
               <a:t>Two generations of monitors. A cathode-ray monitor has an analogue input: the card must convert the digital image into analogue signals with a component called RAMDAC, and noise and distortion enter along the cable. A liquid-crystal monitor has a digital input: the card adapts colours and resolution, and each pixel of the output corresponds exactly to one pixel of the screen. The conversion to analogue, and its defects, disappear.
+UNDERSTAND NOW: the video card.
 For the lecturer: RAMDAC: random access memory digital-analog converter. DVI could also carry analogue VGA signals for compatibility.</a:t>
             </a:r>
             <a:endParaRPr lang="en-US" dirty="0"/>
@@ -3400,6 +3417,420 @@
       </p:pic>
       <p:sp>
         <p:nvSpPr>
+          <p:cNvPr id="15" name="Shape 12"/>
+          <p:cNvSpPr/>
+          <p:nvPr/>
+        </p:nvSpPr>
+        <p:spPr>
+          <a:xfrm>
+            <a:off x="9690303" y="91440"/>
+            <a:ext cx="1952752" cy="274320"/>
+          </a:xfrm>
+          <a:prstGeom prst="rect">
+            <a:avLst/>
+          </a:prstGeom>
+          <a:solidFill>
+            <a:srgbClr val="F3E8FF"/>
+          </a:solidFill>
+          <a:ln w="12700">
+            <a:solidFill>
+              <a:srgbClr val="7E22CE"/>
+            </a:solidFill>
+            <a:prstDash val="dash"/>
+          </a:ln>
+        </p:spPr>
+      </p:sp>
+      <p:sp>
+        <p:nvSpPr>
+          <p:cNvPr id="16" name="Shape 13"/>
+          <p:cNvSpPr/>
+          <p:nvPr/>
+        </p:nvSpPr>
+        <p:spPr>
+          <a:xfrm>
+            <a:off x="9717735" y="128016"/>
+            <a:ext cx="45720" cy="45720"/>
+          </a:xfrm>
+          <a:prstGeom prst="rect">
+            <a:avLst/>
+          </a:prstGeom>
+          <a:solidFill>
+            <a:srgbClr val="7E22CE"/>
+          </a:solidFill>
+          <a:ln w="12700">
+            <a:solidFill>
+              <a:srgbClr val="7E22CE"/>
+            </a:solidFill>
+            <a:prstDash val="solid"/>
+          </a:ln>
+        </p:spPr>
+      </p:sp>
+      <p:sp>
+        <p:nvSpPr>
+          <p:cNvPr id="17" name="Shape 14"/>
+          <p:cNvSpPr/>
+          <p:nvPr/>
+        </p:nvSpPr>
+        <p:spPr>
+          <a:xfrm>
+            <a:off x="9717735" y="205740"/>
+            <a:ext cx="45720" cy="45720"/>
+          </a:xfrm>
+          <a:prstGeom prst="rect">
+            <a:avLst/>
+          </a:prstGeom>
+          <a:solidFill>
+            <a:srgbClr val="7E22CE"/>
+          </a:solidFill>
+          <a:ln w="12700">
+            <a:solidFill>
+              <a:srgbClr val="7E22CE"/>
+            </a:solidFill>
+            <a:prstDash val="solid"/>
+          </a:ln>
+        </p:spPr>
+      </p:sp>
+      <p:sp>
+        <p:nvSpPr>
+          <p:cNvPr id="18" name="Shape 15"/>
+          <p:cNvSpPr/>
+          <p:nvPr/>
+        </p:nvSpPr>
+        <p:spPr>
+          <a:xfrm>
+            <a:off x="9717735" y="283464"/>
+            <a:ext cx="45720" cy="45720"/>
+          </a:xfrm>
+          <a:prstGeom prst="rect">
+            <a:avLst/>
+          </a:prstGeom>
+          <a:solidFill>
+            <a:srgbClr val="7E22CE"/>
+          </a:solidFill>
+          <a:ln w="12700">
+            <a:solidFill>
+              <a:srgbClr val="7E22CE"/>
+            </a:solidFill>
+            <a:prstDash val="solid"/>
+          </a:ln>
+        </p:spPr>
+      </p:sp>
+      <p:pic>
+        <p:nvPicPr>
+          <p:cNvPr id="19" name="Image 1" descr="preencoded.png">    </p:cNvPr>
+          <p:cNvPicPr>
+            <a:picLocks noChangeAspect="1"/>
+          </p:cNvPicPr>
+          <p:nvPr/>
+        </p:nvPicPr>
+        <p:blipFill>
+          <a:blip r:embed="rId2"/>
+          <a:stretch>
+            <a:fillRect/>
+          </a:stretch>
+        </p:blipFill>
+        <p:spPr>
+          <a:xfrm>
+            <a:off x="9818319" y="128016"/>
+            <a:ext cx="201168" cy="201168"/>
+          </a:xfrm>
+          <a:prstGeom prst="rect">
+            <a:avLst/>
+          </a:prstGeom>
+        </p:spPr>
+      </p:pic>
+      <p:sp>
+        <p:nvSpPr>
+          <p:cNvPr id="20" name="Text 16"/>
+          <p:cNvSpPr txBox="1"/>
+          <p:nvPr/>
+        </p:nvSpPr>
+        <p:spPr>
+          <a:xfrm>
+            <a:off x="10074351" y="91440"/>
+            <a:ext cx="1532128" cy="274320"/>
+          </a:xfrm>
+          <a:prstGeom prst="rect">
+            <a:avLst/>
+          </a:prstGeom>
+          <a:noFill/>
+          <a:ln/>
+        </p:spPr>
+        <p:txBody>
+          <a:bodyPr wrap="square" lIns="0" tIns="0" rIns="0" bIns="0" rtlCol="0" anchor="ctr"/>
+          <a:lstStyle/>
+          <a:p>
+            <a:pPr indent="0" marL="0">
+              <a:buNone/>
+            </a:pPr>
+            <a:r>
+              <a:rPr lang="en-US" sz="1100" b="1" dirty="0">
+                <a:solidFill>
+                  <a:srgbClr val="6B21A8"/>
+                </a:solidFill>
+                <a:latin typeface="Calibri" pitchFamily="34" charset="0"/>
+                <a:ea typeface="Calibri" pitchFamily="34" charset="-122"/>
+                <a:cs typeface="Calibri" pitchFamily="34" charset="-120"/>
+              </a:rPr>
+              <a:t>UNDERSTAND LATER</a:t>
+            </a:r>
+            <a:endParaRPr lang="en-US" sz="1100" dirty="0"/>
+          </a:p>
+        </p:txBody>
+      </p:sp>
+      <p:sp>
+        <p:nvSpPr>
+          <p:cNvPr id="21" name="Shape 17"/>
+          <p:cNvSpPr/>
+          <p:nvPr/>
+        </p:nvSpPr>
+        <p:spPr>
+          <a:xfrm>
+            <a:off x="8407349" y="91440"/>
+            <a:ext cx="1173226" cy="274320"/>
+          </a:xfrm>
+          <a:prstGeom prst="rect">
+            <a:avLst/>
+          </a:prstGeom>
+          <a:solidFill>
+            <a:srgbClr val="FEF3C7"/>
+          </a:solidFill>
+          <a:ln w="12700">
+            <a:solidFill>
+              <a:srgbClr val="B45309"/>
+            </a:solidFill>
+            <a:prstDash val="solid"/>
+          </a:ln>
+        </p:spPr>
+      </p:sp>
+      <p:sp>
+        <p:nvSpPr>
+          <p:cNvPr id="22" name="Shape 18"/>
+          <p:cNvSpPr/>
+          <p:nvPr/>
+        </p:nvSpPr>
+        <p:spPr>
+          <a:xfrm>
+            <a:off x="8407349" y="91440"/>
+            <a:ext cx="27432" cy="274320"/>
+          </a:xfrm>
+          <a:prstGeom prst="rect">
+            <a:avLst/>
+          </a:prstGeom>
+          <a:solidFill>
+            <a:srgbClr val="B45309"/>
+          </a:solidFill>
+          <a:ln w="12700">
+            <a:solidFill>
+              <a:srgbClr val="B45309"/>
+            </a:solidFill>
+            <a:prstDash val="solid"/>
+          </a:ln>
+        </p:spPr>
+      </p:sp>
+      <p:sp>
+        <p:nvSpPr>
+          <p:cNvPr id="23" name="Shape 19"/>
+          <p:cNvSpPr/>
+          <p:nvPr/>
+        </p:nvSpPr>
+        <p:spPr>
+          <a:xfrm>
+            <a:off x="8462213" y="91440"/>
+            <a:ext cx="27432" cy="274320"/>
+          </a:xfrm>
+          <a:prstGeom prst="rect">
+            <a:avLst/>
+          </a:prstGeom>
+          <a:solidFill>
+            <a:srgbClr val="B45309"/>
+          </a:solidFill>
+          <a:ln w="12700">
+            <a:solidFill>
+              <a:srgbClr val="B45309"/>
+            </a:solidFill>
+            <a:prstDash val="solid"/>
+          </a:ln>
+        </p:spPr>
+      </p:sp>
+      <p:pic>
+        <p:nvPicPr>
+          <p:cNvPr id="24" name="Image 2" descr="preencoded.png">    </p:cNvPr>
+          <p:cNvPicPr>
+            <a:picLocks noChangeAspect="1"/>
+          </p:cNvPicPr>
+          <p:nvPr/>
+        </p:nvPicPr>
+        <p:blipFill>
+          <a:blip r:embed="rId3"/>
+          <a:stretch>
+            <a:fillRect/>
+          </a:stretch>
+        </p:blipFill>
+        <p:spPr>
+          <a:xfrm>
+            <a:off x="8535365" y="128016"/>
+            <a:ext cx="201168" cy="201168"/>
+          </a:xfrm>
+          <a:prstGeom prst="rect">
+            <a:avLst/>
+          </a:prstGeom>
+        </p:spPr>
+      </p:pic>
+      <p:sp>
+        <p:nvSpPr>
+          <p:cNvPr id="25" name="Text 20"/>
+          <p:cNvSpPr txBox="1"/>
+          <p:nvPr/>
+        </p:nvSpPr>
+        <p:spPr>
+          <a:xfrm>
+            <a:off x="8791397" y="91440"/>
+            <a:ext cx="752602" cy="274320"/>
+          </a:xfrm>
+          <a:prstGeom prst="rect">
+            <a:avLst/>
+          </a:prstGeom>
+          <a:noFill/>
+          <a:ln/>
+        </p:spPr>
+        <p:txBody>
+          <a:bodyPr wrap="square" lIns="0" tIns="0" rIns="0" bIns="0" rtlCol="0" anchor="ctr"/>
+          <a:lstStyle/>
+          <a:p>
+            <a:pPr indent="0" marL="0">
+              <a:buNone/>
+            </a:pPr>
+            <a:r>
+              <a:rPr lang="en-US" sz="1100" b="1" dirty="0">
+                <a:solidFill>
+                  <a:srgbClr val="92400E"/>
+                </a:solidFill>
+                <a:latin typeface="Calibri" pitchFamily="34" charset="0"/>
+                <a:ea typeface="Calibri" pitchFamily="34" charset="-122"/>
+                <a:cs typeface="Calibri" pitchFamily="34" charset="-120"/>
+              </a:rPr>
+              <a:t>USE NOW</a:t>
+            </a:r>
+            <a:endParaRPr lang="en-US" sz="1100" dirty="0"/>
+          </a:p>
+        </p:txBody>
+      </p:sp>
+      <p:sp>
+        <p:nvSpPr>
+          <p:cNvPr id="26" name="Shape 21"/>
+          <p:cNvSpPr/>
+          <p:nvPr/>
+        </p:nvSpPr>
+        <p:spPr>
+          <a:xfrm>
+            <a:off x="6518097" y="91440"/>
+            <a:ext cx="1779524" cy="274320"/>
+          </a:xfrm>
+          <a:prstGeom prst="rect">
+            <a:avLst/>
+          </a:prstGeom>
+          <a:solidFill>
+            <a:srgbClr val="E0F2FE"/>
+          </a:solidFill>
+          <a:ln w="12700">
+            <a:solidFill>
+              <a:srgbClr val="0369A1"/>
+            </a:solidFill>
+            <a:prstDash val="solid"/>
+          </a:ln>
+        </p:spPr>
+      </p:sp>
+      <p:sp>
+        <p:nvSpPr>
+          <p:cNvPr id="27" name="Shape 22"/>
+          <p:cNvSpPr/>
+          <p:nvPr/>
+        </p:nvSpPr>
+        <p:spPr>
+          <a:xfrm>
+            <a:off x="6518097" y="91440"/>
+            <a:ext cx="73152" cy="274320"/>
+          </a:xfrm>
+          <a:prstGeom prst="rect">
+            <a:avLst/>
+          </a:prstGeom>
+          <a:solidFill>
+            <a:srgbClr val="0369A1"/>
+          </a:solidFill>
+          <a:ln w="12700">
+            <a:solidFill>
+              <a:srgbClr val="0369A1"/>
+            </a:solidFill>
+            <a:prstDash val="solid"/>
+          </a:ln>
+        </p:spPr>
+      </p:sp>
+      <p:pic>
+        <p:nvPicPr>
+          <p:cNvPr id="28" name="Image 3" descr="preencoded.png">    </p:cNvPr>
+          <p:cNvPicPr>
+            <a:picLocks noChangeAspect="1"/>
+          </p:cNvPicPr>
+          <p:nvPr/>
+        </p:nvPicPr>
+        <p:blipFill>
+          <a:blip r:embed="rId4"/>
+          <a:stretch>
+            <a:fillRect/>
+          </a:stretch>
+        </p:blipFill>
+        <p:spPr>
+          <a:xfrm>
+            <a:off x="6646113" y="128016"/>
+            <a:ext cx="201168" cy="201168"/>
+          </a:xfrm>
+          <a:prstGeom prst="rect">
+            <a:avLst/>
+          </a:prstGeom>
+        </p:spPr>
+      </p:pic>
+      <p:sp>
+        <p:nvSpPr>
+          <p:cNvPr id="29" name="Text 23"/>
+          <p:cNvSpPr txBox="1"/>
+          <p:nvPr/>
+        </p:nvSpPr>
+        <p:spPr>
+          <a:xfrm>
+            <a:off x="6902145" y="91440"/>
+            <a:ext cx="1358900" cy="274320"/>
+          </a:xfrm>
+          <a:prstGeom prst="rect">
+            <a:avLst/>
+          </a:prstGeom>
+          <a:noFill/>
+          <a:ln/>
+        </p:spPr>
+        <p:txBody>
+          <a:bodyPr wrap="square" lIns="0" tIns="0" rIns="0" bIns="0" rtlCol="0" anchor="ctr"/>
+          <a:lstStyle/>
+          <a:p>
+            <a:pPr indent="0" marL="0">
+              <a:buNone/>
+            </a:pPr>
+            <a:r>
+              <a:rPr lang="en-US" sz="1100" b="1" dirty="0">
+                <a:solidFill>
+                  <a:srgbClr val="075985"/>
+                </a:solidFill>
+                <a:latin typeface="Calibri" pitchFamily="34" charset="0"/>
+                <a:ea typeface="Calibri" pitchFamily="34" charset="-122"/>
+                <a:cs typeface="Calibri" pitchFamily="34" charset="-120"/>
+              </a:rPr>
+              <a:t>UNDERSTAND NOW</a:t>
+            </a:r>
+            <a:endParaRPr lang="en-US" sz="1100" dirty="0"/>
+          </a:p>
+        </p:txBody>
+      </p:sp>
+      <p:sp>
+        <p:nvSpPr>
           <p:cNvPr id="25" name="Slide Number Placeholder 0"/>
           <p:cNvSpPr>
             <a:spLocks noGrp="1"/>
@@ -5190,6 +5621,133 @@
       </p:graphicFrame>
       <p:sp>
         <p:nvSpPr>
+          <p:cNvPr id="4" name="Shape 1"/>
+          <p:cNvSpPr/>
+          <p:nvPr/>
+        </p:nvSpPr>
+        <p:spPr>
+          <a:xfrm>
+            <a:off x="8747328" y="91440"/>
+            <a:ext cx="2895727" cy="274320"/>
+          </a:xfrm>
+          <a:prstGeom prst="rect">
+            <a:avLst/>
+          </a:prstGeom>
+          <a:solidFill>
+            <a:srgbClr val="E0F2FE"/>
+          </a:solidFill>
+          <a:ln w="12700">
+            <a:solidFill>
+              <a:srgbClr val="0369A1"/>
+            </a:solidFill>
+            <a:prstDash val="solid"/>
+          </a:ln>
+        </p:spPr>
+      </p:sp>
+      <p:sp>
+        <p:nvSpPr>
+          <p:cNvPr id="5" name="Shape 2"/>
+          <p:cNvSpPr/>
+          <p:nvPr/>
+        </p:nvSpPr>
+        <p:spPr>
+          <a:xfrm>
+            <a:off x="8747328" y="91440"/>
+            <a:ext cx="73152" cy="274320"/>
+          </a:xfrm>
+          <a:prstGeom prst="rect">
+            <a:avLst/>
+          </a:prstGeom>
+          <a:solidFill>
+            <a:srgbClr val="0369A1"/>
+          </a:solidFill>
+          <a:ln w="12700">
+            <a:solidFill>
+              <a:srgbClr val="0369A1"/>
+            </a:solidFill>
+            <a:prstDash val="solid"/>
+          </a:ln>
+        </p:spPr>
+      </p:sp>
+      <p:pic>
+        <p:nvPicPr>
+          <p:cNvPr id="6" name="Image 0" descr="preencoded.png">    </p:cNvPr>
+          <p:cNvPicPr>
+            <a:picLocks noChangeAspect="1"/>
+          </p:cNvPicPr>
+          <p:nvPr/>
+        </p:nvPicPr>
+        <p:blipFill>
+          <a:blip r:embed="rId1"/>
+          <a:stretch>
+            <a:fillRect/>
+          </a:stretch>
+        </p:blipFill>
+        <p:spPr>
+          <a:xfrm>
+            <a:off x="8875344" y="128016"/>
+            <a:ext cx="201168" cy="201168"/>
+          </a:xfrm>
+          <a:prstGeom prst="rect">
+            <a:avLst/>
+          </a:prstGeom>
+        </p:spPr>
+      </p:pic>
+      <p:sp>
+        <p:nvSpPr>
+          <p:cNvPr id="7" name="Text 3"/>
+          <p:cNvSpPr txBox="1"/>
+          <p:nvPr/>
+        </p:nvSpPr>
+        <p:spPr>
+          <a:xfrm>
+            <a:off x="9131376" y="91440"/>
+            <a:ext cx="2475103" cy="274320"/>
+          </a:xfrm>
+          <a:prstGeom prst="rect">
+            <a:avLst/>
+          </a:prstGeom>
+          <a:noFill/>
+          <a:ln/>
+        </p:spPr>
+        <p:txBody>
+          <a:bodyPr wrap="square" lIns="0" tIns="0" rIns="0" bIns="0" rtlCol="0" anchor="ctr"/>
+          <a:lstStyle/>
+          <a:p>
+            <a:pPr indent="0" marL="0">
+              <a:buNone/>
+            </a:pPr>
+            <a:r>
+              <a:rPr lang="en-US" sz="1100" b="1" dirty="0">
+                <a:solidFill>
+                  <a:srgbClr val="075985"/>
+                </a:solidFill>
+                <a:latin typeface="Calibri" pitchFamily="34" charset="0"/>
+                <a:ea typeface="Calibri" pitchFamily="34" charset="-122"/>
+                <a:cs typeface="Calibri" pitchFamily="34" charset="-120"/>
+              </a:rPr>
+              <a:t>UNDERSTAND NOW</a:t>
+            </a:r>
+            <a:pPr indent="0" marL="0">
+              <a:buNone/>
+            </a:pPr>
+            <a:r>
+              <a:rPr lang="en-US" sz="1100" dirty="0">
+                <a:solidFill>
+                  <a:srgbClr val="075985"/>
+                </a:solidFill>
+                <a:latin typeface="Calibri" pitchFamily="34" charset="0"/>
+                <a:ea typeface="Calibri" pitchFamily="34" charset="-122"/>
+                <a:cs typeface="Calibri" pitchFamily="34" charset="-120"/>
+              </a:rPr>
+              <a:t> · the video card</a:t>
+            </a:r>
+            <a:endParaRPr lang="en-US" sz="1100" dirty="0"/>
+          </a:p>
+        </p:txBody>
+      </p:sp>
+      <p:sp>
+        <p:nvSpPr>
           <p:cNvPr id="25" name="Slide Number Placeholder 0"/>
           <p:cNvSpPr>
             <a:spLocks noGrp="1"/>
@@ -7019,6 +7577,133 @@
       </p:sp>
       <p:sp>
         <p:nvSpPr>
+          <p:cNvPr id="5" name="Shape 2"/>
+          <p:cNvSpPr/>
+          <p:nvPr/>
+        </p:nvSpPr>
+        <p:spPr>
+          <a:xfrm>
+            <a:off x="8747328" y="91440"/>
+            <a:ext cx="2895727" cy="274320"/>
+          </a:xfrm>
+          <a:prstGeom prst="rect">
+            <a:avLst/>
+          </a:prstGeom>
+          <a:solidFill>
+            <a:srgbClr val="E0F2FE"/>
+          </a:solidFill>
+          <a:ln w="12700">
+            <a:solidFill>
+              <a:srgbClr val="0369A1"/>
+            </a:solidFill>
+            <a:prstDash val="solid"/>
+          </a:ln>
+        </p:spPr>
+      </p:sp>
+      <p:sp>
+        <p:nvSpPr>
+          <p:cNvPr id="6" name="Shape 3"/>
+          <p:cNvSpPr/>
+          <p:nvPr/>
+        </p:nvSpPr>
+        <p:spPr>
+          <a:xfrm>
+            <a:off x="8747328" y="91440"/>
+            <a:ext cx="73152" cy="274320"/>
+          </a:xfrm>
+          <a:prstGeom prst="rect">
+            <a:avLst/>
+          </a:prstGeom>
+          <a:solidFill>
+            <a:srgbClr val="0369A1"/>
+          </a:solidFill>
+          <a:ln w="12700">
+            <a:solidFill>
+              <a:srgbClr val="0369A1"/>
+            </a:solidFill>
+            <a:prstDash val="solid"/>
+          </a:ln>
+        </p:spPr>
+      </p:sp>
+      <p:pic>
+        <p:nvPicPr>
+          <p:cNvPr id="7" name="Image 0" descr="preencoded.png">    </p:cNvPr>
+          <p:cNvPicPr>
+            <a:picLocks noChangeAspect="1"/>
+          </p:cNvPicPr>
+          <p:nvPr/>
+        </p:nvPicPr>
+        <p:blipFill>
+          <a:blip r:embed="rId1"/>
+          <a:stretch>
+            <a:fillRect/>
+          </a:stretch>
+        </p:blipFill>
+        <p:spPr>
+          <a:xfrm>
+            <a:off x="8875344" y="128016"/>
+            <a:ext cx="201168" cy="201168"/>
+          </a:xfrm>
+          <a:prstGeom prst="rect">
+            <a:avLst/>
+          </a:prstGeom>
+        </p:spPr>
+      </p:pic>
+      <p:sp>
+        <p:nvSpPr>
+          <p:cNvPr id="8" name="Text 4"/>
+          <p:cNvSpPr txBox="1"/>
+          <p:nvPr/>
+        </p:nvSpPr>
+        <p:spPr>
+          <a:xfrm>
+            <a:off x="9131376" y="91440"/>
+            <a:ext cx="2475103" cy="274320"/>
+          </a:xfrm>
+          <a:prstGeom prst="rect">
+            <a:avLst/>
+          </a:prstGeom>
+          <a:noFill/>
+          <a:ln/>
+        </p:spPr>
+        <p:txBody>
+          <a:bodyPr wrap="square" lIns="0" tIns="0" rIns="0" bIns="0" rtlCol="0" anchor="ctr"/>
+          <a:lstStyle/>
+          <a:p>
+            <a:pPr indent="0" marL="0">
+              <a:buNone/>
+            </a:pPr>
+            <a:r>
+              <a:rPr lang="en-US" sz="1100" b="1" dirty="0">
+                <a:solidFill>
+                  <a:srgbClr val="075985"/>
+                </a:solidFill>
+                <a:latin typeface="Calibri" pitchFamily="34" charset="0"/>
+                <a:ea typeface="Calibri" pitchFamily="34" charset="-122"/>
+                <a:cs typeface="Calibri" pitchFamily="34" charset="-120"/>
+              </a:rPr>
+              <a:t>UNDERSTAND NOW</a:t>
+            </a:r>
+            <a:pPr indent="0" marL="0">
+              <a:buNone/>
+            </a:pPr>
+            <a:r>
+              <a:rPr lang="en-US" sz="1100" dirty="0">
+                <a:solidFill>
+                  <a:srgbClr val="075985"/>
+                </a:solidFill>
+                <a:latin typeface="Calibri" pitchFamily="34" charset="0"/>
+                <a:ea typeface="Calibri" pitchFamily="34" charset="-122"/>
+                <a:cs typeface="Calibri" pitchFamily="34" charset="-120"/>
+              </a:rPr>
+              <a:t> · the video card</a:t>
+            </a:r>
+            <a:endParaRPr lang="en-US" sz="1100" dirty="0"/>
+          </a:p>
+        </p:txBody>
+      </p:sp>
+      <p:sp>
+        <p:nvSpPr>
           <p:cNvPr id="25" name="Slide Number Placeholder 0"/>
           <p:cNvSpPr>
             <a:spLocks noGrp="1"/>
@@ -8535,6 +9220,133 @@
       </p:graphicFrame>
       <p:sp>
         <p:nvSpPr>
+          <p:cNvPr id="4" name="Shape 1"/>
+          <p:cNvSpPr/>
+          <p:nvPr/>
+        </p:nvSpPr>
+        <p:spPr>
+          <a:xfrm>
+            <a:off x="8747328" y="91440"/>
+            <a:ext cx="2895727" cy="274320"/>
+          </a:xfrm>
+          <a:prstGeom prst="rect">
+            <a:avLst/>
+          </a:prstGeom>
+          <a:solidFill>
+            <a:srgbClr val="E0F2FE"/>
+          </a:solidFill>
+          <a:ln w="12700">
+            <a:solidFill>
+              <a:srgbClr val="0369A1"/>
+            </a:solidFill>
+            <a:prstDash val="solid"/>
+          </a:ln>
+        </p:spPr>
+      </p:sp>
+      <p:sp>
+        <p:nvSpPr>
+          <p:cNvPr id="5" name="Shape 2"/>
+          <p:cNvSpPr/>
+          <p:nvPr/>
+        </p:nvSpPr>
+        <p:spPr>
+          <a:xfrm>
+            <a:off x="8747328" y="91440"/>
+            <a:ext cx="73152" cy="274320"/>
+          </a:xfrm>
+          <a:prstGeom prst="rect">
+            <a:avLst/>
+          </a:prstGeom>
+          <a:solidFill>
+            <a:srgbClr val="0369A1"/>
+          </a:solidFill>
+          <a:ln w="12700">
+            <a:solidFill>
+              <a:srgbClr val="0369A1"/>
+            </a:solidFill>
+            <a:prstDash val="solid"/>
+          </a:ln>
+        </p:spPr>
+      </p:sp>
+      <p:pic>
+        <p:nvPicPr>
+          <p:cNvPr id="6" name="Image 0" descr="preencoded.png">    </p:cNvPr>
+          <p:cNvPicPr>
+            <a:picLocks noChangeAspect="1"/>
+          </p:cNvPicPr>
+          <p:nvPr/>
+        </p:nvPicPr>
+        <p:blipFill>
+          <a:blip r:embed="rId1"/>
+          <a:stretch>
+            <a:fillRect/>
+          </a:stretch>
+        </p:blipFill>
+        <p:spPr>
+          <a:xfrm>
+            <a:off x="8875344" y="128016"/>
+            <a:ext cx="201168" cy="201168"/>
+          </a:xfrm>
+          <a:prstGeom prst="rect">
+            <a:avLst/>
+          </a:prstGeom>
+        </p:spPr>
+      </p:pic>
+      <p:sp>
+        <p:nvSpPr>
+          <p:cNvPr id="7" name="Text 3"/>
+          <p:cNvSpPr txBox="1"/>
+          <p:nvPr/>
+        </p:nvSpPr>
+        <p:spPr>
+          <a:xfrm>
+            <a:off x="9131376" y="91440"/>
+            <a:ext cx="2475103" cy="274320"/>
+          </a:xfrm>
+          <a:prstGeom prst="rect">
+            <a:avLst/>
+          </a:prstGeom>
+          <a:noFill/>
+          <a:ln/>
+        </p:spPr>
+        <p:txBody>
+          <a:bodyPr wrap="square" lIns="0" tIns="0" rIns="0" bIns="0" rtlCol="0" anchor="ctr"/>
+          <a:lstStyle/>
+          <a:p>
+            <a:pPr indent="0" marL="0">
+              <a:buNone/>
+            </a:pPr>
+            <a:r>
+              <a:rPr lang="en-US" sz="1100" b="1" dirty="0">
+                <a:solidFill>
+                  <a:srgbClr val="075985"/>
+                </a:solidFill>
+                <a:latin typeface="Calibri" pitchFamily="34" charset="0"/>
+                <a:ea typeface="Calibri" pitchFamily="34" charset="-122"/>
+                <a:cs typeface="Calibri" pitchFamily="34" charset="-120"/>
+              </a:rPr>
+              <a:t>UNDERSTAND NOW</a:t>
+            </a:r>
+            <a:pPr indent="0" marL="0">
+              <a:buNone/>
+            </a:pPr>
+            <a:r>
+              <a:rPr lang="en-US" sz="1100" dirty="0">
+                <a:solidFill>
+                  <a:srgbClr val="075985"/>
+                </a:solidFill>
+                <a:latin typeface="Calibri" pitchFamily="34" charset="0"/>
+                <a:ea typeface="Calibri" pitchFamily="34" charset="-122"/>
+                <a:cs typeface="Calibri" pitchFamily="34" charset="-120"/>
+              </a:rPr>
+              <a:t> · the video card</a:t>
+            </a:r>
+            <a:endParaRPr lang="en-US" sz="1100" dirty="0"/>
+          </a:p>
+        </p:txBody>
+      </p:sp>
+      <p:sp>
+        <p:nvSpPr>
           <p:cNvPr id="25" name="Slide Number Placeholder 0"/>
           <p:cNvSpPr>
             <a:spLocks noGrp="1"/>
@@ -9892,6 +10704,133 @@
       </p:sp>
       <p:sp>
         <p:nvSpPr>
+          <p:cNvPr id="14" name="Shape 11"/>
+          <p:cNvSpPr/>
+          <p:nvPr/>
+        </p:nvSpPr>
+        <p:spPr>
+          <a:xfrm>
+            <a:off x="8616010" y="91440"/>
+            <a:ext cx="3027045" cy="274320"/>
+          </a:xfrm>
+          <a:prstGeom prst="rect">
+            <a:avLst/>
+          </a:prstGeom>
+          <a:solidFill>
+            <a:srgbClr val="E0F2FE"/>
+          </a:solidFill>
+          <a:ln w="12700">
+            <a:solidFill>
+              <a:srgbClr val="0369A1"/>
+            </a:solidFill>
+            <a:prstDash val="solid"/>
+          </a:ln>
+        </p:spPr>
+      </p:sp>
+      <p:sp>
+        <p:nvSpPr>
+          <p:cNvPr id="15" name="Shape 12"/>
+          <p:cNvSpPr/>
+          <p:nvPr/>
+        </p:nvSpPr>
+        <p:spPr>
+          <a:xfrm>
+            <a:off x="8616010" y="91440"/>
+            <a:ext cx="73152" cy="274320"/>
+          </a:xfrm>
+          <a:prstGeom prst="rect">
+            <a:avLst/>
+          </a:prstGeom>
+          <a:solidFill>
+            <a:srgbClr val="0369A1"/>
+          </a:solidFill>
+          <a:ln w="12700">
+            <a:solidFill>
+              <a:srgbClr val="0369A1"/>
+            </a:solidFill>
+            <a:prstDash val="solid"/>
+          </a:ln>
+        </p:spPr>
+      </p:sp>
+      <p:pic>
+        <p:nvPicPr>
+          <p:cNvPr id="16" name="Image 0" descr="preencoded.png">    </p:cNvPr>
+          <p:cNvPicPr>
+            <a:picLocks noChangeAspect="1"/>
+          </p:cNvPicPr>
+          <p:nvPr/>
+        </p:nvPicPr>
+        <p:blipFill>
+          <a:blip r:embed="rId1"/>
+          <a:stretch>
+            <a:fillRect/>
+          </a:stretch>
+        </p:blipFill>
+        <p:spPr>
+          <a:xfrm>
+            <a:off x="8744026" y="128016"/>
+            <a:ext cx="201168" cy="201168"/>
+          </a:xfrm>
+          <a:prstGeom prst="rect">
+            <a:avLst/>
+          </a:prstGeom>
+        </p:spPr>
+      </p:pic>
+      <p:sp>
+        <p:nvSpPr>
+          <p:cNvPr id="17" name="Text 13"/>
+          <p:cNvSpPr txBox="1"/>
+          <p:nvPr/>
+        </p:nvSpPr>
+        <p:spPr>
+          <a:xfrm>
+            <a:off x="9000058" y="91440"/>
+            <a:ext cx="2606421" cy="274320"/>
+          </a:xfrm>
+          <a:prstGeom prst="rect">
+            <a:avLst/>
+          </a:prstGeom>
+          <a:noFill/>
+          <a:ln/>
+        </p:spPr>
+        <p:txBody>
+          <a:bodyPr wrap="square" lIns="0" tIns="0" rIns="0" bIns="0" rtlCol="0" anchor="ctr"/>
+          <a:lstStyle/>
+          <a:p>
+            <a:pPr indent="0" marL="0">
+              <a:buNone/>
+            </a:pPr>
+            <a:r>
+              <a:rPr lang="en-US" sz="1100" b="1" dirty="0">
+                <a:solidFill>
+                  <a:srgbClr val="075985"/>
+                </a:solidFill>
+                <a:latin typeface="Calibri" pitchFamily="34" charset="0"/>
+                <a:ea typeface="Calibri" pitchFamily="34" charset="-122"/>
+                <a:cs typeface="Calibri" pitchFamily="34" charset="-120"/>
+              </a:rPr>
+              <a:t>UNDERSTAND NOW</a:t>
+            </a:r>
+            <a:pPr indent="0" marL="0">
+              <a:buNone/>
+            </a:pPr>
+            <a:r>
+              <a:rPr lang="en-US" sz="1100" dirty="0">
+                <a:solidFill>
+                  <a:srgbClr val="075985"/>
+                </a:solidFill>
+                <a:latin typeface="Calibri" pitchFamily="34" charset="0"/>
+                <a:ea typeface="Calibri" pitchFamily="34" charset="-122"/>
+                <a:cs typeface="Calibri" pitchFamily="34" charset="-120"/>
+              </a:rPr>
+              <a:t> · the frame buffer</a:t>
+            </a:r>
+            <a:endParaRPr lang="en-US" sz="1100" dirty="0"/>
+          </a:p>
+        </p:txBody>
+      </p:sp>
+      <p:sp>
+        <p:nvSpPr>
           <p:cNvPr id="25" name="Slide Number Placeholder 0"/>
           <p:cNvSpPr>
             <a:spLocks noGrp="1"/>
@@ -10486,6 +11425,133 @@
       </p:sp>
       <p:sp>
         <p:nvSpPr>
+          <p:cNvPr id="16" name="Shape 14"/>
+          <p:cNvSpPr/>
+          <p:nvPr/>
+        </p:nvSpPr>
+        <p:spPr>
+          <a:xfrm>
+            <a:off x="8747328" y="91440"/>
+            <a:ext cx="2895727" cy="274320"/>
+          </a:xfrm>
+          <a:prstGeom prst="rect">
+            <a:avLst/>
+          </a:prstGeom>
+          <a:solidFill>
+            <a:srgbClr val="E0F2FE"/>
+          </a:solidFill>
+          <a:ln w="12700">
+            <a:solidFill>
+              <a:srgbClr val="0369A1"/>
+            </a:solidFill>
+            <a:prstDash val="solid"/>
+          </a:ln>
+        </p:spPr>
+      </p:sp>
+      <p:sp>
+        <p:nvSpPr>
+          <p:cNvPr id="17" name="Shape 15"/>
+          <p:cNvSpPr/>
+          <p:nvPr/>
+        </p:nvSpPr>
+        <p:spPr>
+          <a:xfrm>
+            <a:off x="8747328" y="91440"/>
+            <a:ext cx="73152" cy="274320"/>
+          </a:xfrm>
+          <a:prstGeom prst="rect">
+            <a:avLst/>
+          </a:prstGeom>
+          <a:solidFill>
+            <a:srgbClr val="0369A1"/>
+          </a:solidFill>
+          <a:ln w="12700">
+            <a:solidFill>
+              <a:srgbClr val="0369A1"/>
+            </a:solidFill>
+            <a:prstDash val="solid"/>
+          </a:ln>
+        </p:spPr>
+      </p:sp>
+      <p:pic>
+        <p:nvPicPr>
+          <p:cNvPr id="18" name="Image 0" descr="preencoded.png">    </p:cNvPr>
+          <p:cNvPicPr>
+            <a:picLocks noChangeAspect="1"/>
+          </p:cNvPicPr>
+          <p:nvPr/>
+        </p:nvPicPr>
+        <p:blipFill>
+          <a:blip r:embed="rId1"/>
+          <a:stretch>
+            <a:fillRect/>
+          </a:stretch>
+        </p:blipFill>
+        <p:spPr>
+          <a:xfrm>
+            <a:off x="8875344" y="128016"/>
+            <a:ext cx="201168" cy="201168"/>
+          </a:xfrm>
+          <a:prstGeom prst="rect">
+            <a:avLst/>
+          </a:prstGeom>
+        </p:spPr>
+      </p:pic>
+      <p:sp>
+        <p:nvSpPr>
+          <p:cNvPr id="19" name="Text 16"/>
+          <p:cNvSpPr txBox="1"/>
+          <p:nvPr/>
+        </p:nvSpPr>
+        <p:spPr>
+          <a:xfrm>
+            <a:off x="9131376" y="91440"/>
+            <a:ext cx="2475103" cy="274320"/>
+          </a:xfrm>
+          <a:prstGeom prst="rect">
+            <a:avLst/>
+          </a:prstGeom>
+          <a:noFill/>
+          <a:ln/>
+        </p:spPr>
+        <p:txBody>
+          <a:bodyPr wrap="square" lIns="0" tIns="0" rIns="0" bIns="0" rtlCol="0" anchor="ctr"/>
+          <a:lstStyle/>
+          <a:p>
+            <a:pPr indent="0" marL="0">
+              <a:buNone/>
+            </a:pPr>
+            <a:r>
+              <a:rPr lang="en-US" sz="1100" b="1" dirty="0">
+                <a:solidFill>
+                  <a:srgbClr val="075985"/>
+                </a:solidFill>
+                <a:latin typeface="Calibri" pitchFamily="34" charset="0"/>
+                <a:ea typeface="Calibri" pitchFamily="34" charset="-122"/>
+                <a:cs typeface="Calibri" pitchFamily="34" charset="-120"/>
+              </a:rPr>
+              <a:t>UNDERSTAND NOW</a:t>
+            </a:r>
+            <a:pPr indent="0" marL="0">
+              <a:buNone/>
+            </a:pPr>
+            <a:r>
+              <a:rPr lang="en-US" sz="1100" dirty="0">
+                <a:solidFill>
+                  <a:srgbClr val="075985"/>
+                </a:solidFill>
+                <a:latin typeface="Calibri" pitchFamily="34" charset="0"/>
+                <a:ea typeface="Calibri" pitchFamily="34" charset="-122"/>
+                <a:cs typeface="Calibri" pitchFamily="34" charset="-120"/>
+              </a:rPr>
+              <a:t> · the video card</a:t>
+            </a:r>
+            <a:endParaRPr lang="en-US" sz="1100" dirty="0"/>
+          </a:p>
+        </p:txBody>
+      </p:sp>
+      <p:sp>
+        <p:nvSpPr>
           <p:cNvPr id="25" name="Slide Number Placeholder 0"/>
           <p:cNvSpPr>
             <a:spLocks noGrp="1"/>
@@ -11038,6 +12104,133 @@
       </p:sp>
       <p:sp>
         <p:nvSpPr>
+          <p:cNvPr id="15" name="Shape 12"/>
+          <p:cNvSpPr/>
+          <p:nvPr/>
+        </p:nvSpPr>
+        <p:spPr>
+          <a:xfrm>
+            <a:off x="8812987" y="91440"/>
+            <a:ext cx="2830068" cy="274320"/>
+          </a:xfrm>
+          <a:prstGeom prst="rect">
+            <a:avLst/>
+          </a:prstGeom>
+          <a:solidFill>
+            <a:srgbClr val="E0F2FE"/>
+          </a:solidFill>
+          <a:ln w="12700">
+            <a:solidFill>
+              <a:srgbClr val="0369A1"/>
+            </a:solidFill>
+            <a:prstDash val="solid"/>
+          </a:ln>
+        </p:spPr>
+      </p:sp>
+      <p:sp>
+        <p:nvSpPr>
+          <p:cNvPr id="16" name="Shape 13"/>
+          <p:cNvSpPr/>
+          <p:nvPr/>
+        </p:nvSpPr>
+        <p:spPr>
+          <a:xfrm>
+            <a:off x="8812987" y="91440"/>
+            <a:ext cx="73152" cy="274320"/>
+          </a:xfrm>
+          <a:prstGeom prst="rect">
+            <a:avLst/>
+          </a:prstGeom>
+          <a:solidFill>
+            <a:srgbClr val="0369A1"/>
+          </a:solidFill>
+          <a:ln w="12700">
+            <a:solidFill>
+              <a:srgbClr val="0369A1"/>
+            </a:solidFill>
+            <a:prstDash val="solid"/>
+          </a:ln>
+        </p:spPr>
+      </p:sp>
+      <p:pic>
+        <p:nvPicPr>
+          <p:cNvPr id="17" name="Image 1" descr="preencoded.png">    </p:cNvPr>
+          <p:cNvPicPr>
+            <a:picLocks noChangeAspect="1"/>
+          </p:cNvPicPr>
+          <p:nvPr/>
+        </p:nvPicPr>
+        <p:blipFill>
+          <a:blip r:embed="rId2"/>
+          <a:stretch>
+            <a:fillRect/>
+          </a:stretch>
+        </p:blipFill>
+        <p:spPr>
+          <a:xfrm>
+            <a:off x="8941003" y="128016"/>
+            <a:ext cx="201168" cy="201168"/>
+          </a:xfrm>
+          <a:prstGeom prst="rect">
+            <a:avLst/>
+          </a:prstGeom>
+        </p:spPr>
+      </p:pic>
+      <p:sp>
+        <p:nvSpPr>
+          <p:cNvPr id="18" name="Text 14"/>
+          <p:cNvSpPr txBox="1"/>
+          <p:nvPr/>
+        </p:nvSpPr>
+        <p:spPr>
+          <a:xfrm>
+            <a:off x="9197035" y="91440"/>
+            <a:ext cx="2409444" cy="274320"/>
+          </a:xfrm>
+          <a:prstGeom prst="rect">
+            <a:avLst/>
+          </a:prstGeom>
+          <a:noFill/>
+          <a:ln/>
+        </p:spPr>
+        <p:txBody>
+          <a:bodyPr wrap="square" lIns="0" tIns="0" rIns="0" bIns="0" rtlCol="0" anchor="ctr"/>
+          <a:lstStyle/>
+          <a:p>
+            <a:pPr indent="0" marL="0">
+              <a:buNone/>
+            </a:pPr>
+            <a:r>
+              <a:rPr lang="en-US" sz="1100" b="1" dirty="0">
+                <a:solidFill>
+                  <a:srgbClr val="075985"/>
+                </a:solidFill>
+                <a:latin typeface="Calibri" pitchFamily="34" charset="0"/>
+                <a:ea typeface="Calibri" pitchFamily="34" charset="-122"/>
+                <a:cs typeface="Calibri" pitchFamily="34" charset="-120"/>
+              </a:rPr>
+              <a:t>UNDERSTAND NOW</a:t>
+            </a:r>
+            <a:pPr indent="0" marL="0">
+              <a:buNone/>
+            </a:pPr>
+            <a:r>
+              <a:rPr lang="en-US" sz="1100" dirty="0">
+                <a:solidFill>
+                  <a:srgbClr val="075985"/>
+                </a:solidFill>
+                <a:latin typeface="Calibri" pitchFamily="34" charset="0"/>
+                <a:ea typeface="Calibri" pitchFamily="34" charset="-122"/>
+                <a:cs typeface="Calibri" pitchFamily="34" charset="-120"/>
+              </a:rPr>
+              <a:t> · GPU and GPGPU</a:t>
+            </a:r>
+            <a:endParaRPr lang="en-US" sz="1100" dirty="0"/>
+          </a:p>
+        </p:txBody>
+      </p:sp>
+      <p:sp>
+        <p:nvSpPr>
           <p:cNvPr id="25" name="Slide Number Placeholder 0"/>
           <p:cNvSpPr>
             <a:spLocks noGrp="1"/>
@@ -11545,6 +12738,133 @@
               <a:t>The same operation on many data at once</a:t>
             </a:r>
             <a:endParaRPr lang="en-US" sz="1200" dirty="0"/>
+          </a:p>
+        </p:txBody>
+      </p:sp>
+      <p:sp>
+        <p:nvSpPr>
+          <p:cNvPr id="15" name="Shape 12"/>
+          <p:cNvSpPr/>
+          <p:nvPr/>
+        </p:nvSpPr>
+        <p:spPr>
+          <a:xfrm>
+            <a:off x="8812987" y="91440"/>
+            <a:ext cx="2830068" cy="274320"/>
+          </a:xfrm>
+          <a:prstGeom prst="rect">
+            <a:avLst/>
+          </a:prstGeom>
+          <a:solidFill>
+            <a:srgbClr val="E0F2FE"/>
+          </a:solidFill>
+          <a:ln w="12700">
+            <a:solidFill>
+              <a:srgbClr val="0369A1"/>
+            </a:solidFill>
+            <a:prstDash val="solid"/>
+          </a:ln>
+        </p:spPr>
+      </p:sp>
+      <p:sp>
+        <p:nvSpPr>
+          <p:cNvPr id="16" name="Shape 13"/>
+          <p:cNvSpPr/>
+          <p:nvPr/>
+        </p:nvSpPr>
+        <p:spPr>
+          <a:xfrm>
+            <a:off x="8812987" y="91440"/>
+            <a:ext cx="73152" cy="274320"/>
+          </a:xfrm>
+          <a:prstGeom prst="rect">
+            <a:avLst/>
+          </a:prstGeom>
+          <a:solidFill>
+            <a:srgbClr val="0369A1"/>
+          </a:solidFill>
+          <a:ln w="12700">
+            <a:solidFill>
+              <a:srgbClr val="0369A1"/>
+            </a:solidFill>
+            <a:prstDash val="solid"/>
+          </a:ln>
+        </p:spPr>
+      </p:sp>
+      <p:pic>
+        <p:nvPicPr>
+          <p:cNvPr id="17" name="Image 1" descr="preencoded.png">    </p:cNvPr>
+          <p:cNvPicPr>
+            <a:picLocks noChangeAspect="1"/>
+          </p:cNvPicPr>
+          <p:nvPr/>
+        </p:nvPicPr>
+        <p:blipFill>
+          <a:blip r:embed="rId2"/>
+          <a:stretch>
+            <a:fillRect/>
+          </a:stretch>
+        </p:blipFill>
+        <p:spPr>
+          <a:xfrm>
+            <a:off x="8941003" y="128016"/>
+            <a:ext cx="201168" cy="201168"/>
+          </a:xfrm>
+          <a:prstGeom prst="rect">
+            <a:avLst/>
+          </a:prstGeom>
+        </p:spPr>
+      </p:pic>
+      <p:sp>
+        <p:nvSpPr>
+          <p:cNvPr id="18" name="Text 14"/>
+          <p:cNvSpPr txBox="1"/>
+          <p:nvPr/>
+        </p:nvSpPr>
+        <p:spPr>
+          <a:xfrm>
+            <a:off x="9197035" y="91440"/>
+            <a:ext cx="2409444" cy="274320"/>
+          </a:xfrm>
+          <a:prstGeom prst="rect">
+            <a:avLst/>
+          </a:prstGeom>
+          <a:noFill/>
+          <a:ln/>
+        </p:spPr>
+        <p:txBody>
+          <a:bodyPr wrap="square" lIns="0" tIns="0" rIns="0" bIns="0" rtlCol="0" anchor="ctr"/>
+          <a:lstStyle/>
+          <a:p>
+            <a:pPr indent="0" marL="0">
+              <a:buNone/>
+            </a:pPr>
+            <a:r>
+              <a:rPr lang="en-US" sz="1100" b="1" dirty="0">
+                <a:solidFill>
+                  <a:srgbClr val="075985"/>
+                </a:solidFill>
+                <a:latin typeface="Calibri" pitchFamily="34" charset="0"/>
+                <a:ea typeface="Calibri" pitchFamily="34" charset="-122"/>
+                <a:cs typeface="Calibri" pitchFamily="34" charset="-120"/>
+              </a:rPr>
+              <a:t>UNDERSTAND NOW</a:t>
+            </a:r>
+            <a:pPr indent="0" marL="0">
+              <a:buNone/>
+            </a:pPr>
+            <a:r>
+              <a:rPr lang="en-US" sz="1100" dirty="0">
+                <a:solidFill>
+                  <a:srgbClr val="075985"/>
+                </a:solidFill>
+                <a:latin typeface="Calibri" pitchFamily="34" charset="0"/>
+                <a:ea typeface="Calibri" pitchFamily="34" charset="-122"/>
+                <a:cs typeface="Calibri" pitchFamily="34" charset="-120"/>
+              </a:rPr>
+              <a:t> · GPU and GPGPU</a:t>
+            </a:r>
+            <a:endParaRPr lang="en-US" sz="1100" dirty="0"/>
           </a:p>
         </p:txBody>
       </p:sp>
@@ -17277,6 +18597,133 @@
       </p:sp>
       <p:sp>
         <p:nvSpPr>
+          <p:cNvPr id="11" name="Shape 9"/>
+          <p:cNvSpPr/>
+          <p:nvPr/>
+        </p:nvSpPr>
+        <p:spPr>
+          <a:xfrm>
+            <a:off x="8484692" y="91440"/>
+            <a:ext cx="3158363" cy="274320"/>
+          </a:xfrm>
+          <a:prstGeom prst="rect">
+            <a:avLst/>
+          </a:prstGeom>
+          <a:solidFill>
+            <a:srgbClr val="E0F2FE"/>
+          </a:solidFill>
+          <a:ln w="12700">
+            <a:solidFill>
+              <a:srgbClr val="0369A1"/>
+            </a:solidFill>
+            <a:prstDash val="solid"/>
+          </a:ln>
+        </p:spPr>
+      </p:sp>
+      <p:sp>
+        <p:nvSpPr>
+          <p:cNvPr id="12" name="Shape 10"/>
+          <p:cNvSpPr/>
+          <p:nvPr/>
+        </p:nvSpPr>
+        <p:spPr>
+          <a:xfrm>
+            <a:off x="8484692" y="91440"/>
+            <a:ext cx="73152" cy="274320"/>
+          </a:xfrm>
+          <a:prstGeom prst="rect">
+            <a:avLst/>
+          </a:prstGeom>
+          <a:solidFill>
+            <a:srgbClr val="0369A1"/>
+          </a:solidFill>
+          <a:ln w="12700">
+            <a:solidFill>
+              <a:srgbClr val="0369A1"/>
+            </a:solidFill>
+            <a:prstDash val="solid"/>
+          </a:ln>
+        </p:spPr>
+      </p:sp>
+      <p:pic>
+        <p:nvPicPr>
+          <p:cNvPr id="13" name="Image 0" descr="preencoded.png">    </p:cNvPr>
+          <p:cNvPicPr>
+            <a:picLocks noChangeAspect="1"/>
+          </p:cNvPicPr>
+          <p:nvPr/>
+        </p:nvPicPr>
+        <p:blipFill>
+          <a:blip r:embed="rId1"/>
+          <a:stretch>
+            <a:fillRect/>
+          </a:stretch>
+        </p:blipFill>
+        <p:spPr>
+          <a:xfrm>
+            <a:off x="8612708" y="128016"/>
+            <a:ext cx="201168" cy="201168"/>
+          </a:xfrm>
+          <a:prstGeom prst="rect">
+            <a:avLst/>
+          </a:prstGeom>
+        </p:spPr>
+      </p:pic>
+      <p:sp>
+        <p:nvSpPr>
+          <p:cNvPr id="14" name="Text 11"/>
+          <p:cNvSpPr txBox="1"/>
+          <p:nvPr/>
+        </p:nvSpPr>
+        <p:spPr>
+          <a:xfrm>
+            <a:off x="8868740" y="91440"/>
+            <a:ext cx="2737739" cy="274320"/>
+          </a:xfrm>
+          <a:prstGeom prst="rect">
+            <a:avLst/>
+          </a:prstGeom>
+          <a:noFill/>
+          <a:ln/>
+        </p:spPr>
+        <p:txBody>
+          <a:bodyPr wrap="square" lIns="0" tIns="0" rIns="0" bIns="0" rtlCol="0" anchor="ctr"/>
+          <a:lstStyle/>
+          <a:p>
+            <a:pPr indent="0" marL="0">
+              <a:buNone/>
+            </a:pPr>
+            <a:r>
+              <a:rPr lang="en-US" sz="1100" b="1" dirty="0">
+                <a:solidFill>
+                  <a:srgbClr val="075985"/>
+                </a:solidFill>
+                <a:latin typeface="Calibri" pitchFamily="34" charset="0"/>
+                <a:ea typeface="Calibri" pitchFamily="34" charset="-122"/>
+                <a:cs typeface="Calibri" pitchFamily="34" charset="-120"/>
+              </a:rPr>
+              <a:t>UNDERSTAND NOW</a:t>
+            </a:r>
+            <a:pPr indent="0" marL="0">
+              <a:buNone/>
+            </a:pPr>
+            <a:r>
+              <a:rPr lang="en-US" sz="1100" dirty="0">
+                <a:solidFill>
+                  <a:srgbClr val="075985"/>
+                </a:solidFill>
+                <a:latin typeface="Calibri" pitchFamily="34" charset="0"/>
+                <a:ea typeface="Calibri" pitchFamily="34" charset="-122"/>
+                <a:cs typeface="Calibri" pitchFamily="34" charset="-120"/>
+              </a:rPr>
+              <a:t> · device controllers</a:t>
+            </a:r>
+            <a:endParaRPr lang="en-US" sz="1100" dirty="0"/>
+          </a:p>
+        </p:txBody>
+      </p:sp>
+      <p:sp>
+        <p:nvSpPr>
           <p:cNvPr id="25" name="Slide Number Placeholder 0"/>
           <p:cNvSpPr>
             <a:spLocks noGrp="1"/>
@@ -18416,6 +19863,133 @@
       </p:sp>
       <p:sp>
         <p:nvSpPr>
+          <p:cNvPr id="31" name="Shape 29"/>
+          <p:cNvSpPr/>
+          <p:nvPr/>
+        </p:nvSpPr>
+        <p:spPr>
+          <a:xfrm>
+            <a:off x="8484692" y="91440"/>
+            <a:ext cx="3158363" cy="274320"/>
+          </a:xfrm>
+          <a:prstGeom prst="rect">
+            <a:avLst/>
+          </a:prstGeom>
+          <a:solidFill>
+            <a:srgbClr val="E0F2FE"/>
+          </a:solidFill>
+          <a:ln w="12700">
+            <a:solidFill>
+              <a:srgbClr val="0369A1"/>
+            </a:solidFill>
+            <a:prstDash val="solid"/>
+          </a:ln>
+        </p:spPr>
+      </p:sp>
+      <p:sp>
+        <p:nvSpPr>
+          <p:cNvPr id="32" name="Shape 30"/>
+          <p:cNvSpPr/>
+          <p:nvPr/>
+        </p:nvSpPr>
+        <p:spPr>
+          <a:xfrm>
+            <a:off x="8484692" y="91440"/>
+            <a:ext cx="73152" cy="274320"/>
+          </a:xfrm>
+          <a:prstGeom prst="rect">
+            <a:avLst/>
+          </a:prstGeom>
+          <a:solidFill>
+            <a:srgbClr val="0369A1"/>
+          </a:solidFill>
+          <a:ln w="12700">
+            <a:solidFill>
+              <a:srgbClr val="0369A1"/>
+            </a:solidFill>
+            <a:prstDash val="solid"/>
+          </a:ln>
+        </p:spPr>
+      </p:sp>
+      <p:pic>
+        <p:nvPicPr>
+          <p:cNvPr id="33" name="Image 0" descr="preencoded.png">    </p:cNvPr>
+          <p:cNvPicPr>
+            <a:picLocks noChangeAspect="1"/>
+          </p:cNvPicPr>
+          <p:nvPr/>
+        </p:nvPicPr>
+        <p:blipFill>
+          <a:blip r:embed="rId1"/>
+          <a:stretch>
+            <a:fillRect/>
+          </a:stretch>
+        </p:blipFill>
+        <p:spPr>
+          <a:xfrm>
+            <a:off x="8612708" y="128016"/>
+            <a:ext cx="201168" cy="201168"/>
+          </a:xfrm>
+          <a:prstGeom prst="rect">
+            <a:avLst/>
+          </a:prstGeom>
+        </p:spPr>
+      </p:pic>
+      <p:sp>
+        <p:nvSpPr>
+          <p:cNvPr id="34" name="Text 31"/>
+          <p:cNvSpPr txBox="1"/>
+          <p:nvPr/>
+        </p:nvSpPr>
+        <p:spPr>
+          <a:xfrm>
+            <a:off x="8868740" y="91440"/>
+            <a:ext cx="2737739" cy="274320"/>
+          </a:xfrm>
+          <a:prstGeom prst="rect">
+            <a:avLst/>
+          </a:prstGeom>
+          <a:noFill/>
+          <a:ln/>
+        </p:spPr>
+        <p:txBody>
+          <a:bodyPr wrap="square" lIns="0" tIns="0" rIns="0" bIns="0" rtlCol="0" anchor="ctr"/>
+          <a:lstStyle/>
+          <a:p>
+            <a:pPr indent="0" marL="0">
+              <a:buNone/>
+            </a:pPr>
+            <a:r>
+              <a:rPr lang="en-US" sz="1100" b="1" dirty="0">
+                <a:solidFill>
+                  <a:srgbClr val="075985"/>
+                </a:solidFill>
+                <a:latin typeface="Calibri" pitchFamily="34" charset="0"/>
+                <a:ea typeface="Calibri" pitchFamily="34" charset="-122"/>
+                <a:cs typeface="Calibri" pitchFamily="34" charset="-120"/>
+              </a:rPr>
+              <a:t>UNDERSTAND NOW</a:t>
+            </a:r>
+            <a:pPr indent="0" marL="0">
+              <a:buNone/>
+            </a:pPr>
+            <a:r>
+              <a:rPr lang="en-US" sz="1100" dirty="0">
+                <a:solidFill>
+                  <a:srgbClr val="075985"/>
+                </a:solidFill>
+                <a:latin typeface="Calibri" pitchFamily="34" charset="0"/>
+                <a:ea typeface="Calibri" pitchFamily="34" charset="-122"/>
+                <a:cs typeface="Calibri" pitchFamily="34" charset="-120"/>
+              </a:rPr>
+              <a:t> · device controllers</a:t>
+            </a:r>
+            <a:endParaRPr lang="en-US" sz="1100" dirty="0"/>
+          </a:p>
+        </p:txBody>
+      </p:sp>
+      <p:sp>
+        <p:nvSpPr>
           <p:cNvPr id="25" name="Slide Number Placeholder 0"/>
           <p:cNvSpPr>
             <a:spLocks noGrp="1"/>
@@ -19030,6 +20604,133 @@
       </p:sp>
       <p:sp>
         <p:nvSpPr>
+          <p:cNvPr id="16" name="Shape 14"/>
+          <p:cNvSpPr/>
+          <p:nvPr/>
+        </p:nvSpPr>
+        <p:spPr>
+          <a:xfrm>
+            <a:off x="8419033" y="91440"/>
+            <a:ext cx="3224022" cy="274320"/>
+          </a:xfrm>
+          <a:prstGeom prst="rect">
+            <a:avLst/>
+          </a:prstGeom>
+          <a:solidFill>
+            <a:srgbClr val="E0F2FE"/>
+          </a:solidFill>
+          <a:ln w="12700">
+            <a:solidFill>
+              <a:srgbClr val="0369A1"/>
+            </a:solidFill>
+            <a:prstDash val="solid"/>
+          </a:ln>
+        </p:spPr>
+      </p:sp>
+      <p:sp>
+        <p:nvSpPr>
+          <p:cNvPr id="17" name="Shape 15"/>
+          <p:cNvSpPr/>
+          <p:nvPr/>
+        </p:nvSpPr>
+        <p:spPr>
+          <a:xfrm>
+            <a:off x="8419033" y="91440"/>
+            <a:ext cx="73152" cy="274320"/>
+          </a:xfrm>
+          <a:prstGeom prst="rect">
+            <a:avLst/>
+          </a:prstGeom>
+          <a:solidFill>
+            <a:srgbClr val="0369A1"/>
+          </a:solidFill>
+          <a:ln w="12700">
+            <a:solidFill>
+              <a:srgbClr val="0369A1"/>
+            </a:solidFill>
+            <a:prstDash val="solid"/>
+          </a:ln>
+        </p:spPr>
+      </p:sp>
+      <p:pic>
+        <p:nvPicPr>
+          <p:cNvPr id="18" name="Image 0" descr="preencoded.png">    </p:cNvPr>
+          <p:cNvPicPr>
+            <a:picLocks noChangeAspect="1"/>
+          </p:cNvPicPr>
+          <p:nvPr/>
+        </p:nvPicPr>
+        <p:blipFill>
+          <a:blip r:embed="rId1"/>
+          <a:stretch>
+            <a:fillRect/>
+          </a:stretch>
+        </p:blipFill>
+        <p:spPr>
+          <a:xfrm>
+            <a:off x="8547049" y="128016"/>
+            <a:ext cx="201168" cy="201168"/>
+          </a:xfrm>
+          <a:prstGeom prst="rect">
+            <a:avLst/>
+          </a:prstGeom>
+        </p:spPr>
+      </p:pic>
+      <p:sp>
+        <p:nvSpPr>
+          <p:cNvPr id="19" name="Text 16"/>
+          <p:cNvSpPr txBox="1"/>
+          <p:nvPr/>
+        </p:nvSpPr>
+        <p:spPr>
+          <a:xfrm>
+            <a:off x="8803081" y="91440"/>
+            <a:ext cx="2803398" cy="274320"/>
+          </a:xfrm>
+          <a:prstGeom prst="rect">
+            <a:avLst/>
+          </a:prstGeom>
+          <a:noFill/>
+          <a:ln/>
+        </p:spPr>
+        <p:txBody>
+          <a:bodyPr wrap="square" lIns="0" tIns="0" rIns="0" bIns="0" rtlCol="0" anchor="ctr"/>
+          <a:lstStyle/>
+          <a:p>
+            <a:pPr indent="0" marL="0">
+              <a:buNone/>
+            </a:pPr>
+            <a:r>
+              <a:rPr lang="en-US" sz="1100" b="1" dirty="0">
+                <a:solidFill>
+                  <a:srgbClr val="075985"/>
+                </a:solidFill>
+                <a:latin typeface="Calibri" pitchFamily="34" charset="0"/>
+                <a:ea typeface="Calibri" pitchFamily="34" charset="-122"/>
+                <a:cs typeface="Calibri" pitchFamily="34" charset="-120"/>
+              </a:rPr>
+              <a:t>UNDERSTAND NOW</a:t>
+            </a:r>
+            <a:pPr indent="0" marL="0">
+              <a:buNone/>
+            </a:pPr>
+            <a:r>
+              <a:rPr lang="en-US" sz="1100" dirty="0">
+                <a:solidFill>
+                  <a:srgbClr val="075985"/>
+                </a:solidFill>
+                <a:latin typeface="Calibri" pitchFamily="34" charset="0"/>
+                <a:ea typeface="Calibri" pitchFamily="34" charset="-122"/>
+                <a:cs typeface="Calibri" pitchFamily="34" charset="-120"/>
+              </a:rPr>
+              <a:t> · buses and bandwidth</a:t>
+            </a:r>
+            <a:endParaRPr lang="en-US" sz="1100" dirty="0"/>
+          </a:p>
+        </p:txBody>
+      </p:sp>
+      <p:sp>
+        <p:nvSpPr>
           <p:cNvPr id="25" name="Slide Number Placeholder 0"/>
           <p:cNvSpPr>
             <a:spLocks noGrp="1"/>
@@ -19499,6 +21200,133 @@
               <a:t>A shared resource: only one transfer at a time</a:t>
             </a:r>
             <a:endParaRPr lang="en-US" sz="2100" dirty="0"/>
+          </a:p>
+        </p:txBody>
+      </p:sp>
+      <p:sp>
+        <p:nvSpPr>
+          <p:cNvPr id="9" name="Shape 7"/>
+          <p:cNvSpPr/>
+          <p:nvPr/>
+        </p:nvSpPr>
+        <p:spPr>
+          <a:xfrm>
+            <a:off x="8419033" y="91440"/>
+            <a:ext cx="3224022" cy="274320"/>
+          </a:xfrm>
+          <a:prstGeom prst="rect">
+            <a:avLst/>
+          </a:prstGeom>
+          <a:solidFill>
+            <a:srgbClr val="E0F2FE"/>
+          </a:solidFill>
+          <a:ln w="12700">
+            <a:solidFill>
+              <a:srgbClr val="0369A1"/>
+            </a:solidFill>
+            <a:prstDash val="solid"/>
+          </a:ln>
+        </p:spPr>
+      </p:sp>
+      <p:sp>
+        <p:nvSpPr>
+          <p:cNvPr id="10" name="Shape 8"/>
+          <p:cNvSpPr/>
+          <p:nvPr/>
+        </p:nvSpPr>
+        <p:spPr>
+          <a:xfrm>
+            <a:off x="8419033" y="91440"/>
+            <a:ext cx="73152" cy="274320"/>
+          </a:xfrm>
+          <a:prstGeom prst="rect">
+            <a:avLst/>
+          </a:prstGeom>
+          <a:solidFill>
+            <a:srgbClr val="0369A1"/>
+          </a:solidFill>
+          <a:ln w="12700">
+            <a:solidFill>
+              <a:srgbClr val="0369A1"/>
+            </a:solidFill>
+            <a:prstDash val="solid"/>
+          </a:ln>
+        </p:spPr>
+      </p:sp>
+      <p:pic>
+        <p:nvPicPr>
+          <p:cNvPr id="11" name="Image 0" descr="preencoded.png">    </p:cNvPr>
+          <p:cNvPicPr>
+            <a:picLocks noChangeAspect="1"/>
+          </p:cNvPicPr>
+          <p:nvPr/>
+        </p:nvPicPr>
+        <p:blipFill>
+          <a:blip r:embed="rId1"/>
+          <a:stretch>
+            <a:fillRect/>
+          </a:stretch>
+        </p:blipFill>
+        <p:spPr>
+          <a:xfrm>
+            <a:off x="8547049" y="128016"/>
+            <a:ext cx="201168" cy="201168"/>
+          </a:xfrm>
+          <a:prstGeom prst="rect">
+            <a:avLst/>
+          </a:prstGeom>
+        </p:spPr>
+      </p:pic>
+      <p:sp>
+        <p:nvSpPr>
+          <p:cNvPr id="12" name="Text 9"/>
+          <p:cNvSpPr txBox="1"/>
+          <p:nvPr/>
+        </p:nvSpPr>
+        <p:spPr>
+          <a:xfrm>
+            <a:off x="8803081" y="91440"/>
+            <a:ext cx="2803398" cy="274320"/>
+          </a:xfrm>
+          <a:prstGeom prst="rect">
+            <a:avLst/>
+          </a:prstGeom>
+          <a:noFill/>
+          <a:ln/>
+        </p:spPr>
+        <p:txBody>
+          <a:bodyPr wrap="square" lIns="0" tIns="0" rIns="0" bIns="0" rtlCol="0" anchor="ctr"/>
+          <a:lstStyle/>
+          <a:p>
+            <a:pPr indent="0" marL="0">
+              <a:buNone/>
+            </a:pPr>
+            <a:r>
+              <a:rPr lang="en-US" sz="1100" b="1" dirty="0">
+                <a:solidFill>
+                  <a:srgbClr val="075985"/>
+                </a:solidFill>
+                <a:latin typeface="Calibri" pitchFamily="34" charset="0"/>
+                <a:ea typeface="Calibri" pitchFamily="34" charset="-122"/>
+                <a:cs typeface="Calibri" pitchFamily="34" charset="-120"/>
+              </a:rPr>
+              <a:t>UNDERSTAND NOW</a:t>
+            </a:r>
+            <a:pPr indent="0" marL="0">
+              <a:buNone/>
+            </a:pPr>
+            <a:r>
+              <a:rPr lang="en-US" sz="1100" dirty="0">
+                <a:solidFill>
+                  <a:srgbClr val="075985"/>
+                </a:solidFill>
+                <a:latin typeface="Calibri" pitchFamily="34" charset="0"/>
+                <a:ea typeface="Calibri" pitchFamily="34" charset="-122"/>
+                <a:cs typeface="Calibri" pitchFamily="34" charset="-120"/>
+              </a:rPr>
+              <a:t> · buses and bandwidth</a:t>
+            </a:r>
+            <a:endParaRPr lang="en-US" sz="1100" dirty="0"/>
           </a:p>
         </p:txBody>
       </p:sp>
@@ -21842,6 +23670,133 @@
       </p:graphicFrame>
       <p:sp>
         <p:nvSpPr>
+          <p:cNvPr id="4" name="Shape 1"/>
+          <p:cNvSpPr/>
+          <p:nvPr/>
+        </p:nvSpPr>
+        <p:spPr>
+          <a:xfrm>
+            <a:off x="8419033" y="91440"/>
+            <a:ext cx="3224022" cy="274320"/>
+          </a:xfrm>
+          <a:prstGeom prst="rect">
+            <a:avLst/>
+          </a:prstGeom>
+          <a:solidFill>
+            <a:srgbClr val="E0F2FE"/>
+          </a:solidFill>
+          <a:ln w="12700">
+            <a:solidFill>
+              <a:srgbClr val="0369A1"/>
+            </a:solidFill>
+            <a:prstDash val="solid"/>
+          </a:ln>
+        </p:spPr>
+      </p:sp>
+      <p:sp>
+        <p:nvSpPr>
+          <p:cNvPr id="5" name="Shape 2"/>
+          <p:cNvSpPr/>
+          <p:nvPr/>
+        </p:nvSpPr>
+        <p:spPr>
+          <a:xfrm>
+            <a:off x="8419033" y="91440"/>
+            <a:ext cx="73152" cy="274320"/>
+          </a:xfrm>
+          <a:prstGeom prst="rect">
+            <a:avLst/>
+          </a:prstGeom>
+          <a:solidFill>
+            <a:srgbClr val="0369A1"/>
+          </a:solidFill>
+          <a:ln w="12700">
+            <a:solidFill>
+              <a:srgbClr val="0369A1"/>
+            </a:solidFill>
+            <a:prstDash val="solid"/>
+          </a:ln>
+        </p:spPr>
+      </p:sp>
+      <p:pic>
+        <p:nvPicPr>
+          <p:cNvPr id="6" name="Image 0" descr="preencoded.png">    </p:cNvPr>
+          <p:cNvPicPr>
+            <a:picLocks noChangeAspect="1"/>
+          </p:cNvPicPr>
+          <p:nvPr/>
+        </p:nvPicPr>
+        <p:blipFill>
+          <a:blip r:embed="rId1"/>
+          <a:stretch>
+            <a:fillRect/>
+          </a:stretch>
+        </p:blipFill>
+        <p:spPr>
+          <a:xfrm>
+            <a:off x="8547049" y="128016"/>
+            <a:ext cx="201168" cy="201168"/>
+          </a:xfrm>
+          <a:prstGeom prst="rect">
+            <a:avLst/>
+          </a:prstGeom>
+        </p:spPr>
+      </p:pic>
+      <p:sp>
+        <p:nvSpPr>
+          <p:cNvPr id="7" name="Text 3"/>
+          <p:cNvSpPr txBox="1"/>
+          <p:nvPr/>
+        </p:nvSpPr>
+        <p:spPr>
+          <a:xfrm>
+            <a:off x="8803081" y="91440"/>
+            <a:ext cx="2803398" cy="274320"/>
+          </a:xfrm>
+          <a:prstGeom prst="rect">
+            <a:avLst/>
+          </a:prstGeom>
+          <a:noFill/>
+          <a:ln/>
+        </p:spPr>
+        <p:txBody>
+          <a:bodyPr wrap="square" lIns="0" tIns="0" rIns="0" bIns="0" rtlCol="0" anchor="ctr"/>
+          <a:lstStyle/>
+          <a:p>
+            <a:pPr indent="0" marL="0">
+              <a:buNone/>
+            </a:pPr>
+            <a:r>
+              <a:rPr lang="en-US" sz="1100" b="1" dirty="0">
+                <a:solidFill>
+                  <a:srgbClr val="075985"/>
+                </a:solidFill>
+                <a:latin typeface="Calibri" pitchFamily="34" charset="0"/>
+                <a:ea typeface="Calibri" pitchFamily="34" charset="-122"/>
+                <a:cs typeface="Calibri" pitchFamily="34" charset="-120"/>
+              </a:rPr>
+              <a:t>UNDERSTAND NOW</a:t>
+            </a:r>
+            <a:pPr indent="0" marL="0">
+              <a:buNone/>
+            </a:pPr>
+            <a:r>
+              <a:rPr lang="en-US" sz="1100" dirty="0">
+                <a:solidFill>
+                  <a:srgbClr val="075985"/>
+                </a:solidFill>
+                <a:latin typeface="Calibri" pitchFamily="34" charset="0"/>
+                <a:ea typeface="Calibri" pitchFamily="34" charset="-122"/>
+                <a:cs typeface="Calibri" pitchFamily="34" charset="-120"/>
+              </a:rPr>
+              <a:t> · buses and bandwidth</a:t>
+            </a:r>
+            <a:endParaRPr lang="en-US" sz="1100" dirty="0"/>
+          </a:p>
+        </p:txBody>
+      </p:sp>
+      <p:sp>
+        <p:nvSpPr>
           <p:cNvPr id="25" name="Slide Number Placeholder 0"/>
           <p:cNvSpPr>
             <a:spLocks noGrp="1"/>
@@ -22291,6 +24246,133 @@
       </p:sp>
       <p:sp>
         <p:nvSpPr>
+          <p:cNvPr id="13" name="Shape 11"/>
+          <p:cNvSpPr/>
+          <p:nvPr/>
+        </p:nvSpPr>
+        <p:spPr>
+          <a:xfrm>
+            <a:off x="8747328" y="91440"/>
+            <a:ext cx="2895727" cy="274320"/>
+          </a:xfrm>
+          <a:prstGeom prst="rect">
+            <a:avLst/>
+          </a:prstGeom>
+          <a:solidFill>
+            <a:srgbClr val="E0F2FE"/>
+          </a:solidFill>
+          <a:ln w="12700">
+            <a:solidFill>
+              <a:srgbClr val="0369A1"/>
+            </a:solidFill>
+            <a:prstDash val="solid"/>
+          </a:ln>
+        </p:spPr>
+      </p:sp>
+      <p:sp>
+        <p:nvSpPr>
+          <p:cNvPr id="14" name="Shape 12"/>
+          <p:cNvSpPr/>
+          <p:nvPr/>
+        </p:nvSpPr>
+        <p:spPr>
+          <a:xfrm>
+            <a:off x="8747328" y="91440"/>
+            <a:ext cx="73152" cy="274320"/>
+          </a:xfrm>
+          <a:prstGeom prst="rect">
+            <a:avLst/>
+          </a:prstGeom>
+          <a:solidFill>
+            <a:srgbClr val="0369A1"/>
+          </a:solidFill>
+          <a:ln w="12700">
+            <a:solidFill>
+              <a:srgbClr val="0369A1"/>
+            </a:solidFill>
+            <a:prstDash val="solid"/>
+          </a:ln>
+        </p:spPr>
+      </p:sp>
+      <p:pic>
+        <p:nvPicPr>
+          <p:cNvPr id="15" name="Image 0" descr="preencoded.png">    </p:cNvPr>
+          <p:cNvPicPr>
+            <a:picLocks noChangeAspect="1"/>
+          </p:cNvPicPr>
+          <p:nvPr/>
+        </p:nvPicPr>
+        <p:blipFill>
+          <a:blip r:embed="rId1"/>
+          <a:stretch>
+            <a:fillRect/>
+          </a:stretch>
+        </p:blipFill>
+        <p:spPr>
+          <a:xfrm>
+            <a:off x="8875344" y="128016"/>
+            <a:ext cx="201168" cy="201168"/>
+          </a:xfrm>
+          <a:prstGeom prst="rect">
+            <a:avLst/>
+          </a:prstGeom>
+        </p:spPr>
+      </p:pic>
+      <p:sp>
+        <p:nvSpPr>
+          <p:cNvPr id="16" name="Text 13"/>
+          <p:cNvSpPr txBox="1"/>
+          <p:nvPr/>
+        </p:nvSpPr>
+        <p:spPr>
+          <a:xfrm>
+            <a:off x="9131376" y="91440"/>
+            <a:ext cx="2475103" cy="274320"/>
+          </a:xfrm>
+          <a:prstGeom prst="rect">
+            <a:avLst/>
+          </a:prstGeom>
+          <a:noFill/>
+          <a:ln/>
+        </p:spPr>
+        <p:txBody>
+          <a:bodyPr wrap="square" lIns="0" tIns="0" rIns="0" bIns="0" rtlCol="0" anchor="ctr"/>
+          <a:lstStyle/>
+          <a:p>
+            <a:pPr indent="0" marL="0">
+              <a:buNone/>
+            </a:pPr>
+            <a:r>
+              <a:rPr lang="en-US" sz="1100" b="1" dirty="0">
+                <a:solidFill>
+                  <a:srgbClr val="075985"/>
+                </a:solidFill>
+                <a:latin typeface="Calibri" pitchFamily="34" charset="0"/>
+                <a:ea typeface="Calibri" pitchFamily="34" charset="-122"/>
+                <a:cs typeface="Calibri" pitchFamily="34" charset="-120"/>
+              </a:rPr>
+              <a:t>UNDERSTAND NOW</a:t>
+            </a:r>
+            <a:pPr indent="0" marL="0">
+              <a:buNone/>
+            </a:pPr>
+            <a:r>
+              <a:rPr lang="en-US" sz="1100" dirty="0">
+                <a:solidFill>
+                  <a:srgbClr val="075985"/>
+                </a:solidFill>
+                <a:latin typeface="Calibri" pitchFamily="34" charset="0"/>
+                <a:ea typeface="Calibri" pitchFamily="34" charset="-122"/>
+                <a:cs typeface="Calibri" pitchFamily="34" charset="-120"/>
+              </a:rPr>
+              <a:t> · the video card</a:t>
+            </a:r>
+            <a:endParaRPr lang="en-US" sz="1100" dirty="0"/>
+          </a:p>
+        </p:txBody>
+      </p:sp>
+      <p:sp>
+        <p:nvSpPr>
           <p:cNvPr id="25" name="Slide Number Placeholder 0"/>
           <p:cNvSpPr>
             <a:spLocks noGrp="1"/>
@@ -22760,6 +24842,133 @@
               <a:t>DVI: each pixel of the output corresponds to one pixel of the screen, at its native resolution</a:t>
             </a:r>
             <a:endParaRPr lang="en-US" sz="2100" dirty="0"/>
+          </a:p>
+        </p:txBody>
+      </p:sp>
+      <p:sp>
+        <p:nvSpPr>
+          <p:cNvPr id="9" name="Shape 7"/>
+          <p:cNvSpPr/>
+          <p:nvPr/>
+        </p:nvSpPr>
+        <p:spPr>
+          <a:xfrm>
+            <a:off x="8747328" y="91440"/>
+            <a:ext cx="2895727" cy="274320"/>
+          </a:xfrm>
+          <a:prstGeom prst="rect">
+            <a:avLst/>
+          </a:prstGeom>
+          <a:solidFill>
+            <a:srgbClr val="E0F2FE"/>
+          </a:solidFill>
+          <a:ln w="12700">
+            <a:solidFill>
+              <a:srgbClr val="0369A1"/>
+            </a:solidFill>
+            <a:prstDash val="solid"/>
+          </a:ln>
+        </p:spPr>
+      </p:sp>
+      <p:sp>
+        <p:nvSpPr>
+          <p:cNvPr id="10" name="Shape 8"/>
+          <p:cNvSpPr/>
+          <p:nvPr/>
+        </p:nvSpPr>
+        <p:spPr>
+          <a:xfrm>
+            <a:off x="8747328" y="91440"/>
+            <a:ext cx="73152" cy="274320"/>
+          </a:xfrm>
+          <a:prstGeom prst="rect">
+            <a:avLst/>
+          </a:prstGeom>
+          <a:solidFill>
+            <a:srgbClr val="0369A1"/>
+          </a:solidFill>
+          <a:ln w="12700">
+            <a:solidFill>
+              <a:srgbClr val="0369A1"/>
+            </a:solidFill>
+            <a:prstDash val="solid"/>
+          </a:ln>
+        </p:spPr>
+      </p:sp>
+      <p:pic>
+        <p:nvPicPr>
+          <p:cNvPr id="11" name="Image 0" descr="preencoded.png">    </p:cNvPr>
+          <p:cNvPicPr>
+            <a:picLocks noChangeAspect="1"/>
+          </p:cNvPicPr>
+          <p:nvPr/>
+        </p:nvPicPr>
+        <p:blipFill>
+          <a:blip r:embed="rId1"/>
+          <a:stretch>
+            <a:fillRect/>
+          </a:stretch>
+        </p:blipFill>
+        <p:spPr>
+          <a:xfrm>
+            <a:off x="8875344" y="128016"/>
+            <a:ext cx="201168" cy="201168"/>
+          </a:xfrm>
+          <a:prstGeom prst="rect">
+            <a:avLst/>
+          </a:prstGeom>
+        </p:spPr>
+      </p:pic>
+      <p:sp>
+        <p:nvSpPr>
+          <p:cNvPr id="12" name="Text 9"/>
+          <p:cNvSpPr txBox="1"/>
+          <p:nvPr/>
+        </p:nvSpPr>
+        <p:spPr>
+          <a:xfrm>
+            <a:off x="9131376" y="91440"/>
+            <a:ext cx="2475103" cy="274320"/>
+          </a:xfrm>
+          <a:prstGeom prst="rect">
+            <a:avLst/>
+          </a:prstGeom>
+          <a:noFill/>
+          <a:ln/>
+        </p:spPr>
+        <p:txBody>
+          <a:bodyPr wrap="square" lIns="0" tIns="0" rIns="0" bIns="0" rtlCol="0" anchor="ctr"/>
+          <a:lstStyle/>
+          <a:p>
+            <a:pPr indent="0" marL="0">
+              <a:buNone/>
+            </a:pPr>
+            <a:r>
+              <a:rPr lang="en-US" sz="1100" b="1" dirty="0">
+                <a:solidFill>
+                  <a:srgbClr val="075985"/>
+                </a:solidFill>
+                <a:latin typeface="Calibri" pitchFamily="34" charset="0"/>
+                <a:ea typeface="Calibri" pitchFamily="34" charset="-122"/>
+                <a:cs typeface="Calibri" pitchFamily="34" charset="-120"/>
+              </a:rPr>
+              <a:t>UNDERSTAND NOW</a:t>
+            </a:r>
+            <a:pPr indent="0" marL="0">
+              <a:buNone/>
+            </a:pPr>
+            <a:r>
+              <a:rPr lang="en-US" sz="1100" dirty="0">
+                <a:solidFill>
+                  <a:srgbClr val="075985"/>
+                </a:solidFill>
+                <a:latin typeface="Calibri" pitchFamily="34" charset="0"/>
+                <a:ea typeface="Calibri" pitchFamily="34" charset="-122"/>
+                <a:cs typeface="Calibri" pitchFamily="34" charset="-120"/>
+              </a:rPr>
+              <a:t> · the video card</a:t>
+            </a:r>
+            <a:endParaRPr lang="en-US" sz="1100" dirty="0"/>
           </a:p>
         </p:txBody>
       </p:sp>

--- a/en/slides/20-Computer_Architecture-Video_Card.pptx
+++ b/en/slides/20-Computer_Architecture-Video_Card.pptx
@@ -126,26 +126,26 @@
   <p:extLst>
     <p:ext uri="{521415D9-36F7-43E2-AB2F-B90AF26B5E84}">
       <p14:sectionLst xmlns:p14="http://schemas.microsoft.com/office/powerpoint/2010/main">
-        <p14:section name="Opening" id="{c22efe62-7aa1-dbcf-48c2-7b483619461f}">
+        <p14:section name="Opening" id="{71e8a953-2a1b-40f4-542e-223cebbf29ab}">
           <p14:sldIdLst>
             <p14:sldId id="256"/>
             <p14:sldId id="257"/>
           </p14:sldIdLst>
         </p14:section>
-        <p14:section name="Peripherals and controllers" id="{02706fb6-11d4-8c24-2c9a-2013aae7ecc5}">
+        <p14:section name="Peripherals and controllers" id="{1d2a6464-0cd9-5f59-01b0-cd8ce602e1cb}">
           <p14:sldIdLst>
             <p14:sldId id="258"/>
             <p14:sldId id="259"/>
           </p14:sldIdLst>
         </p14:section>
-        <p14:section name="Buses" id="{1c22d38e-5795-7c39-b6e0-48528171e6b5}">
+        <p14:section name="Buses" id="{7958d00c-b0be-d764-fe1b-bb96ce7322d8}">
           <p14:sldIdLst>
             <p14:sldId id="260"/>
             <p14:sldId id="261"/>
             <p14:sldId id="262"/>
           </p14:sldIdLst>
         </p14:section>
-        <p14:section name="The video card" id="{d1140f6b-ef81-5cf8-d843-af225611711e}">
+        <p14:section name="The video card" id="{74e253c9-d137-de03-1750-ca0b9b8ed5d6}">
           <p14:sldIdLst>
             <p14:sldId id="263"/>
             <p14:sldId id="264"/>
@@ -156,7 +156,7 @@
             <p14:sldId id="269"/>
           </p14:sldIdLst>
         </p14:section>
-        <p14:section name="GPU and GPGPU" id="{590b0f1b-5135-1fa7-a58e-7ea32c9658ee}">
+        <p14:section name="GPU and GPGPU" id="{d90f1292-335b-3319-b3c9-9ce931517308}">
           <p14:sldIdLst>
             <p14:sldId id="270"/>
             <p14:sldId id="271"/>

--- a/en/slides/20-Computer_Architecture-Video_Card.pptx
+++ b/en/slides/20-Computer_Architecture-Video_Card.pptx
@@ -126,26 +126,26 @@
   <p:extLst>
     <p:ext uri="{521415D9-36F7-43E2-AB2F-B90AF26B5E84}">
       <p14:sectionLst xmlns:p14="http://schemas.microsoft.com/office/powerpoint/2010/main">
-        <p14:section name="Opening" id="{71e8a953-2a1b-40f4-542e-223cebbf29ab}">
+        <p14:section name="Opening" id="{548b342c-2aa3-3c1e-9e6b-8dbcf540b145}">
           <p14:sldIdLst>
             <p14:sldId id="256"/>
             <p14:sldId id="257"/>
           </p14:sldIdLst>
         </p14:section>
-        <p14:section name="Peripherals and controllers" id="{1d2a6464-0cd9-5f59-01b0-cd8ce602e1cb}">
+        <p14:section name="Peripherals and controllers" id="{2fd2ee33-8a36-950c-9306-dd18a6f9b41f}">
           <p14:sldIdLst>
             <p14:sldId id="258"/>
             <p14:sldId id="259"/>
           </p14:sldIdLst>
         </p14:section>
-        <p14:section name="Buses" id="{7958d00c-b0be-d764-fe1b-bb96ce7322d8}">
+        <p14:section name="Buses" id="{ec120b8b-7805-2332-b319-1c32b8caf59d}">
           <p14:sldIdLst>
             <p14:sldId id="260"/>
             <p14:sldId id="261"/>
             <p14:sldId id="262"/>
           </p14:sldIdLst>
         </p14:section>
-        <p14:section name="The video card" id="{74e253c9-d137-de03-1750-ca0b9b8ed5d6}">
+        <p14:section name="The video card" id="{c5bae071-37bc-8687-0aa5-1e75779026a1}">
           <p14:sldIdLst>
             <p14:sldId id="263"/>
             <p14:sldId id="264"/>
@@ -156,7 +156,7 @@
             <p14:sldId id="269"/>
           </p14:sldIdLst>
         </p14:section>
-        <p14:section name="GPU and GPGPU" id="{d90f1292-335b-3319-b3c9-9ce931517308}">
+        <p14:section name="GPU and GPGPU" id="{403e7482-3627-6335-6e13-1887855b97e4}">
           <p14:sldIdLst>
             <p14:sldId id="270"/>
             <p14:sldId id="271"/>
@@ -570,7 +570,7 @@
           <a:p>
             <a:r>
               <a:rPr lang="en-US" dirty="0"/>
-              <a:t>With this lecture the course leaves the processor and turns to what surrounds it. The subject is the path of an image: from a number in memory to a point of light on the screen. On the way you meet two general ideas, the controller of a peripheral and the bus, and one specific machine, the video card, with its processor, the GPU. The kit has no video card at all, and this is an advantage: every step that a card would hide is done by code you can read.
+              <a:t>With this lecture the course leaves the processor and turns to its surroundings. The subject is the path of an image, from a number in memory to a point of light on the screen. Along the way two general ideas are encountered, the peripheral controller and the bus, together with one specific machine, the video card and its processor, the GPU. The kit has no video card at all, and for teaching purposes this is an advantage: every step that a card would conceal is performed by code that can be read, and its cost measured.
 Learning status: UNDERSTAND NOW, by the end of this lecture you explain it, trace it and apply it on your own; USE NOW, you follow and use the recipe today; how it works inside is explained later, or is not part of the course; UNDERSTAND LATER, recognise the name and what it is for; a later lecture explains it. A slide without a badge is context: a story, an example, a question, an exercise.
 Learning status of this lecture. UNDERSTAND NOW: the frame buffer; device controllers; buses and bandwidth; the video card; GPU and GPGPU. USE NOW: the complete program, the PRG32 tools (used, not studied, in this course). UNDERSTAND LATER: nothing. A slide without a badge is context: a story, an example, a question, an exercise.
 For the lecturer: Spiral: one call draws one pixel on PRG32; the lecture follows that pixel from the frame buffer to the display, then generalises to buses, video cards, GPUs and GPGPU. The kit has no video card: its processor does everything, which makes every step visible.</a:t>
@@ -661,7 +661,7 @@
           <a:p>
             <a:r>
               <a:rPr lang="en-US" dirty="0"/>
-              <a:t>The outputs, in order of time. VGA, analogue, for cathode-ray monitors. DVI, the first digital output, which arrived with LCD monitors. HDMI, digital, which also carries audio. DisplayPort, digital, which also travels on USB-C connectors. The last row is the kit: the display is reached over an SPI bus, and the chip on the display module, an ILI9341, plays the part of the monitor's electronics for a panel of 320 by 240 pixels.
+              <a:t>The outputs, in chronological order. VGA, analogue, for cathode-ray monitors. DVI, the first digital output, which arrived with LCD monitors. HDMI, digital, which also carries audio. DisplayPort, digital, which can also travel over USB-C connectors. The last row is the kit: the display is reached over an SPI bus, and the chip on the display module, an ILI9341, plays the role of the monitor electronics for a panel of 320 by 240 pixels, with its own memory for the frame.
 UNDERSTAND NOW: the video card.
 For the lecturer: High-Definition Multimedia Interface; Digital Visual Interface; Video Graphics Array. The ILI9341 is the chip on the display module: it has its own memory for the frame and drives the liquid crystals (Lecture 21).</a:t>
             </a:r>
@@ -751,7 +751,7 @@
           <a:p>
             <a:r>
               <a:rPr lang="en-US" dirty="0"/>
-              <a:t>Resolution is the size of the grid of pixels, columns by rows. The table goes from 320 by 200, 64,000 pixels, the resolution of the Commodore 64 and of the PRG32 viewport, to 4K with more than eight million. The third column is the aspect ratio: the traditional 4:3 has given way to 16:9. Resolution determines the definition of the image, and also how many pixels must be stored and sent for every frame.
+              <a:t>Resolution is the size of the pixel grid, columns by rows. The table ranges from 320 by 200, 64,000 pixels, the resolution of the Commodore 64 and of the PRG32 viewport, to 4K, with more than eight million. The third column gives the aspect ratio, where the traditional 4:3 has given way to 16:9. Resolution determines the definition of the image, and also the number of pixels that must be stored and transmitted for each frame.
 UNDERSTAND NOW: the video card.
 For the lecturer: The table of the original deck also listed 800 x 600, 1280 x 1024 (5:4) and 1600 x 1200. The traditional 4:3 ratio has given way to the panoramic 16:9. The 4K row is new.</a:t>
             </a:r>
@@ -841,7 +841,7 @@
           <a:p>
             <a:r>
               <a:rPr lang="en-US" dirty="0"/>
-              <a:t>Colour depth is the number of bits per pixel. With 4 bits there are 16 colours; with 8 bits, 256, and each value is usually an index into a table of colours, the palette; with 16 bits, 65,536, in the RGB565 format you know; with 24 bits, more than sixteen million, 256 shades for each primary. Memory for a frame is pixels times bytes per pixel. PRG32 uses the two middle rows together: an 8-bit frame buffer of indices and a palette of 256 RGB565 colours.
+              <a:t>Colour depth is the number of bits per pixel. With 4 bits there are 16 colours; with 8 bits, 256, each value usually an index into a colour table, the palette; with 16 bits, 65,536, in the familiar RGB565 format; with 24 bits, more than sixteen million, with 256 levels for each primary. The memory required by a frame is the number of pixels times the bytes per pixel. PRG32 combines the two middle rows: an 8-bit frame buffer of indices and a palette of 256 RGB565 colours, trading colour freedom for memory.
 UNDERSTAND NOW: the video card.
 For the lecturer: In True Color every colour is obtained from 256 shades of each of the three additive primaries. PRG32 uses both middle rows: an 8-bit frame buffer of palette indices, and a palette of 256 RGB565 colours (Lecture 04).</a:t>
             </a:r>
@@ -931,7 +931,7 @@
           <a:p>
             <a:r>
               <a:rPr lang="en-US" dirty="0"/>
-              <a:t>The path of the pixel on the kit, in five boxes: your code, the frame buffer in RAM, the palette that turns an index into a colour, the SPI bus, the display. The table does the arithmetic. One frame at one byte per pixel is 64,000 bytes; at two bytes it would be a quarter of the chip's RAM. On the bus each pixel travels as 16 bits: about a million bits per frame, 38 milliseconds at 27 MHz. Hence the two engineering answers: an indexed frame buffer, and sending only what changed.
+              <a:t>The path of a pixel on the kit, in five stages: the program, the frame buffer in RAM, the palette that maps an index to a colour, the SPI bus, the display. The table carries out the arithmetic. One frame at one byte per pixel occupies 64,000 bytes; at two bytes it would consume a quarter of the chip's RAM. On the bus each pixel travels as 16 bits, about a million bits per frame, or 38 milliseconds at 27 MHz. Two engineering responses follow: an indexed frame buffer, and transmitting only what has changed, which Verm1 Part 4 implements.
 UNDERSTAND NOW: the frame buffer.
 For the lecturer: Figures from the PRG32 repository (docs/hardware/ili9341.md): 64,000-byte 8-bit indexed frame buffer, 512-byte palette, default SPI clock of 27 MHz, DMA transfers and dirty-rectangle tracking. 1,024,000 / 27,000,000 = 37.9 ms. The FPS counter of the demo cartridges shows the result.</a:t>
             </a:r>
@@ -1021,7 +1021,7 @@
           <a:p>
             <a:r>
               <a:rPr lang="en-US" dirty="0"/>
-              <a:t>The same arithmetic, at the scale of a PC, explains the history of video hardware. More definition means more memory for each frame, and the flow of data towards the card risks saturating the bus. The two answers were more memory on the card itself, and a wider or dedicated bus: AGP first, PCI Express today. The figure on the right gives the scale: a 4K screen at 60 frames per second is about one and a half gigabytes of pixels every second.
+              <a:t>The same arithmetic at the scale of a PC explains the history of video hardware. Higher definition requires more memory per frame, and the stream of data towards the card threatens to saturate the bus. The two responses were more memory on the card itself and a wider or dedicated bus: AGP first, PCI Express today. The figure on the right conveys the scale: a 4K screen at 60 frames per second amounts to about one and a half gigabytes of pixels every second.
 UNDERSTAND NOW: the video card.
 For the lecturer: With AGP the graphics processor used part of the main memory through direct access. PCI Express (2004) replaced it with more bandwidth and more power. SLI (NVIDIA) and CrossFire (AMD) linked up to four cards; today a single card, or many cards in a server, are the rule.</a:t>
             </a:r>
@@ -1111,7 +1111,7 @@
           <a:p>
             <a:r>
               <a:rPr lang="en-US" dirty="0"/>
-              <a:t>As graphical interfaces spread, computing images took a growing share of processor time. To relieve the CPU, video cards received dedicated processors: graphics processing units. They accelerate raster operations, such as copying blocks of pixels, and 3D graphics: transformations, textures, lighting. Programs reach them through libraries, and a device driver adapts the software to the primitives of each GPU. On the kit there is no GPU: a rectangle is a loop of stores executed by the RISC-V core, and you can see its cost.
+              <a:t>As graphical interfaces spread, computing images consumed a growing share of processor time. To relieve the CPU, video cards acquired dedicated processors, graphics processing units, which accelerate raster operations, such as copying blocks of pixels, and 3D graphics: transformations, textures, lighting. Programs reach them through libraries, and a device driver adapts the software to the primitives of each GPU. The kit has no GPU: a rectangle is a loop of stores executed by the RISC-V core, and its cost is directly observable.
 UNDERSTAND NOW: GPU and GPGPU.
 For the lecturer: On PRG32 there is no GPU: prg32_gfx_rect is a loop of store instructions executed by the RISC-V core. This is why the frame rate of a busy cartridge drops, and why the students can see the cost of every pixel.</a:t>
             </a:r>
@@ -1201,7 +1201,7 @@
           <a:p>
             <a:r>
               <a:rPr lang="en-US" dirty="0"/>
-              <a:t>A GPU applies the same operation, in parallel, to whole matrices of pixels. Nothing obliges those numbers to be pixels: GPGPU is the use of graphics processors for general computation. A GPU has a very large number of simple cores, and is programmed with models such as CUDA and OpenCL. Scientific simulation, data analysis and, above all today, the training and use of neural networks run on GPUs. The picture recalls the parallel sum of Lecture 04: the same operation on many data at once.
+              <a:t>A GPU applies the same operation in parallel to whole matrices of pixels, and nothing requires those numbers to be pixels: GPGPU is the use of graphics processors for general computation. A GPU contains a very large number of simple cores and is programmed with models such as CUDA and OpenCL. Scientific simulation, data analysis and, above all today, the training and inference of neural networks run on GPUs. The picture recalls the parallel sum of Lecture 04: one operation applied to many data at once. Lecture 24 returns to this model of computation.
 UNDERSTAND NOW: GPU and GPGPU.
 For the lecturer: Compute Unified Device Architecture. The parallel sum of Lecture 04 is the simplest GPGPU example. The weather and marine models of the Department run on GPU clusters.</a:t>
             </a:r>
@@ -1291,8 +1291,8 @@
           <a:p>
             <a:r>
               <a:rPr lang="en-US" dirty="0"/>
-              <a:t>Memory for a frame is the number of pixels times the bytes per pixel. First compute the pixels, then remember how many bytes 24 bits are.
-Transfer rate is width times frequency. Convert the width into bytes before multiplying.
+              <a:t>For the first question: the memory required by a frame is the number of pixels times the bytes per pixel. The pixels are computed first, then one recalls how many bytes 24 bits represent.
+For the second: the transfer rate is width times frequency, with the width converted to bytes before multiplying.
 For the lecturer: 1. Answer: C. 307,200 pixels x 3 bytes = 921,600 bytes.
 2. Answer: B. 2 bytes x 50 million transfers per second = 100 MB/s.</a:t>
             </a:r>
@@ -1382,8 +1382,8 @@
           <a:p>
             <a:r>
               <a:rPr lang="en-US" dirty="0"/>
-              <a:t>"Indexed" is the key word. The byte does not describe the colour: it says where to find it.
-Expand the acronym: the first two letters stand for "general-purpose".
+              <a:t>For the first question "indexed" is the key word: the byte does not describe the colour but indicates where to find it.
+For the second, the acronym is expanded: its first two letters stand for "general-purpose".
 For the lecturer: 1. Answer: C. The byte is an index; the actual colour is looked up in a table of 256 entries, the palette.
 2. Answer: B. General-purpose computing on graphics processing units.</a:t>
             </a:r>
@@ -1473,7 +1473,7 @@
           <a:p>
             <a:r>
               <a:rPr lang="en-US" dirty="0"/>
-              <a:t>Ten terms. A peripheral is a periferica; its controller keeps the English name. Bus width and transfer rate are larghezza del bus and velocità di trasferimento. Colour depth is profondità di colore. A palette is a tavolozza, though programmers say palette. A device driver is the software that adapts programs to a specific device.</a:t>
+              <a:t>Ten terms. A peripheral is a periferica; its controller retains the English name. Bus width and transfer rate are larghezza del bus and velocità di trasferimento. Colour depth is profondità di colore. A palette is a tavolozza, though programmers say palette. A device driver is the software that adapts programs to a specific device.</a:t>
             </a:r>
             <a:endParaRPr lang="en-US" dirty="0"/>
           </a:p>
@@ -1561,7 +1561,7 @@
           <a:p>
             <a:r>
               <a:rPr lang="en-US" dirty="0"/>
-              <a:t>Five objectives. Explain what a peripheral controller is and why devices must be synchronised with the processor. Characterise a bus by its width, speed and transfer rate. Describe the job of a video card: frame buffer, resolution, colour depth and output interface. Compute how much memory a frame needs and how long it takes to send it along a bus. And explain what a GPU does and what it means to use it for general computation.</a:t>
+              <a:t>Five learning outcomes. Explaining what a peripheral controller is and why devices must be synchronised with the processor. Characterising a bus by its width, speed and transfer rate. Describing the function of a video card: frame buffer, resolution, colour depth and output interface. Computing the memory a frame requires and the time needed to send it across a bus. And explaining what a GPU does and what it means to use it for general-purpose computation.</a:t>
             </a:r>
             <a:endParaRPr lang="en-US" dirty="0"/>
           </a:p>
@@ -1649,7 +1649,7 @@
           <a:p>
             <a:r>
               <a:rPr lang="en-US" dirty="0"/>
-              <a:t>Five conclusions. Input/output devices are a fundamental part of a computer. Each is managed by a controller that interfaces it to the bus. A bus is characterised by width, speed and transfer rate, and its bandwidth is a limit to design around. A video card displays graphics and text: a frame buffer, a resolution, a colour depth, an output. And its processors, the GPUs, are used today for high-performance computing. The next lecture covers the other devices of input and output.
+              <a:t>Five conclusions. Input/output devices are a fundamental part of a computer. Each is managed by a controller that interfaces it to the bus. A bus is characterised by width, speed and transfer rate, and its bandwidth is a constraint that designs must respect. A video card displays graphics and text through a frame buffer, a resolution, a colour depth and an output interface. And its processors, the GPUs, are today used for high-performance computing. The next lecture covers the other input and output devices.
 Learning status, recap. UNDERSTAND NOW: the frame buffer; device controllers; buses and bandwidth; the video card; GPU and GPGPU. USE NOW: the complete program, the PRG32 tools (used, not studied, in this course). UNDERSTAND LATER: nothing. A slide without a badge is context: a story, an example, a question, an exercise.
 For the lecturer: Next lecture: input and output devices.</a:t>
             </a:r>
@@ -1739,7 +1739,7 @@
           <a:p>
             <a:r>
               <a:rPr lang="en-US" dirty="0"/>
-              <a:t>Peripherals serve the interaction between the user and the system. They have limited autonomy: the processor controls and coordinates them. And they work asynchronously, at their own pace, so mechanisms of synchronisation are needed: to know when an input datum is available, and when an output device has finished. The terminal, the most common instrument of interaction, is really two independent devices, a keyboard and a video; it is the processor that copies to the video what arrives from the keyboard.
+              <a:t>Peripherals serve the interaction between the user and the system. They enjoy limited autonomy, being controlled and coordinated by the processor. And they operate asynchronously, at their own pace, so synchronisation mechanisms are required: to know when an input datum is available, and when an output device has completed its task. The terminal, the most common instrument of interaction, consists in fact of two independent devices, a keyboard and a display; it is the processor that copies to the display what arrives from the keyboard.
 UNDERSTAND NOW: device controllers.
 For the lecturer: Keyboard and video are not directly connected: the processor reproduces on the video what arrives from the keyboard (Lecture 21).</a:t>
             </a:r>
@@ -1829,7 +1829,7 @@
           <a:p>
             <a:r>
               <a:rPr lang="en-US" dirty="0"/>
-              <a:t>A peripheral is never connected to the processor directly: between them is a controller. Look at the diagram: the processor and the memory are on the bus, and so are the controllers; each controller has its device on the other side. The controller manages the dialogue with the device and presents a few registers on the bus, which the processor reads and writes like memory. When an operation ends it usually raises an interrupt, as in the previous lecture. The video card is the controller of the monitor.
+              <a:t>A peripheral is never connected directly to the processor: a controller is interposed. In the diagram, processor and memory sit on the bus, and so do the controllers, each with its device on the far side. The controller manages the dialogue with the device and presents a few registers on the bus, which the processor reads and writes as memory, by the memory-mapped I/O of Lecture 15. When an operation completes, the controller typically raises an interrupt, as in the previous lecture. The video card is the controller of the monitor.
 UNDERSTAND NOW: device controllers.
 For the lecturer: On the ESP32-C6 the controllers (SPI, I2S, GPIO, USB) are on the same chip as the processor, and their registers are memory-mapped (Lecture 15).</a:t>
             </a:r>
@@ -1919,7 +1919,7 @@
           <a:p>
             <a:r>
               <a:rPr lang="en-US" dirty="0"/>
-              <a:t>A bus is a communication channel shared by several units, and its characteristics decide the performance of the whole system. Its width is the number of bits of the data bus. Its speed is the frequency at which it works. Their product is the transfer rate: a 32-bit bus at 66 MHz carries 4 bytes 66 million times per second, 264 megabytes per second. A bus is also a standard: signals, connectors and a protocol on which all the units agree.
+              <a:t>A bus is a communication channel shared by several units, and its characteristics determine the performance of the whole system. Its width is the number of bits of the data bus; its speed is the frequency at which it operates; their product is the transfer rate. A 32-bit bus at 66 MHz carries 4 bytes 66 million times per second, 264 megabytes per second. A bus is also a standard: signals, connectors and a protocol on which all the attached units agree.
 UNDERSTAND NOW: buses and bandwidth.
 For the lecturer: The example is the PCI bus: 4 bytes x 66 million cycles per second = 264 MB/s. Interface: the hardware module that encodes the data electrically or optically. Protocol: the higher-level description of how the dialogue takes place.</a:t>
             </a:r>
@@ -2009,7 +2009,7 @@
           <a:p>
             <a:r>
               <a:rPr lang="en-US" dirty="0"/>
-              <a:t>Why buses, and what they cost. The advantages: new devices are added easily; a peripheral can move to another computer with the same bus; one set of wires connects many peripherals; the cost per byte is low. The disadvantages: the bandwidth of the bus limits the transfer speed; the maximum speed falls as the bus gets longer and as more devices are attached; and, being shared, the bus carries only one transfer at a time.
+              <a:t>The merits and costs of buses. The advantages: new devices are added easily; a peripheral can be moved to another computer with the same bus; one set of wires connects many peripherals; the cost per byte transferred is low. The disadvantages: the bandwidth of the bus bounds the transfer speed; the maximum speed decreases as the bus grows longer and as more devices are attached; and, being shared, the bus carries only one transfer at a time, the limitation already observed for the common bus of Lecture 14.
 UNDERSTAND NOW: buses and bandwidth.</a:t>
             </a:r>
             <a:endParaRPr lang="en-US" dirty="0"/>
@@ -2098,7 +2098,7 @@
           <a:p>
             <a:r>
               <a:rPr lang="en-US" dirty="0"/>
-              <a:t>Forty years of buses in one table. Read it by columns. The early buses, ISA, PCI, AGP for the video card alone, IDE and SCSI for disks, were parallel: many wires side by side. Their successors, PCI Express, Serial ATA, USB, are serial: few wires, much faster. It is the lesson of Lecture 14. The last row is the kit: SPI, I2C and I2S are the small serial buses that connect chips on the same board.
+              <a:t>Forty years of buses in one table, best read by columns. The early buses, ISA, PCI, AGP for the video card alone, IDE and SCSI for disks, were parallel, with many wires side by side. Their successors, PCI Express, Serial ATA and USB, are serial: few wires, far higher speeds. This is the trend stated in Lecture 14, now documented historically. The last row is the kit: SPI, I2C and I2S are the small serial buses that connect chips on the same board.
 UNDERSTAND NOW: buses and bandwidth.
 For the lecturer: USB: universal serial bus. PCI: peripheral component interconnect. AGP: accelerated graphics port. IDE: integrated device electronics. ISA: industry standard architecture. SCSI: small computer system interface. PCMCIA and FireWire were in the original list. The move from parallel to serial is the lesson of Lecture 14.</a:t>
             </a:r>
@@ -2188,7 +2188,7 @@
           <a:p>
             <a:r>
               <a:rPr lang="en-US" dirty="0"/>
-              <a:t>The function of a video card is to send the monitor the information to display. It translates the representation of the image that the processor produces into a form the monitor can show. It has memory of its own, the video memory, which holds the frame: the frame buffer. Every time the screen is redrawn, the card reads that memory and sends the signal for the colour of each pixel. And it has its own processing capability, which the last part of the lecture examines.
+              <a:t>The function of a video card is to supply the monitor with the information to be displayed. It translates the representation of the image produced by the processor into a form the monitor can render. It has a memory of its own, the video memory, which holds the frame, the frame buffer. At every refresh of the screen the card reads that memory and emits the signal encoding the colour of each pixel. It also has its own processing capability, which the last part of the lecture examines.
 UNDERSTAND NOW: the video card.
 For the lecturer: DAC: digital-to-analogue converter, needed for analogue monitors. On PRG32 the 'video card' is a region of RAM plus the SPI peripheral: no separate hardware at all.</a:t>
             </a:r>
@@ -2278,7 +2278,7 @@
           <a:p>
             <a:r>
               <a:rPr lang="en-US" dirty="0"/>
-              <a:t>Two generations of monitors. A cathode-ray monitor has an analogue input: the card must convert the digital image into analogue signals with a component called RAMDAC, and noise and distortion enter along the cable. A liquid-crystal monitor has a digital input: the card adapts colours and resolution, and each pixel of the output corresponds exactly to one pixel of the screen. The conversion to analogue, and its defects, disappear.
+              <a:t>Two generations of monitor. A cathode-ray monitor has an analogue input: the card must convert the digital image into analogue signals with a component called the RAMDAC, and noise and distortion enter along the cable. A liquid-crystal monitor has a digital input: the card adapts colours and resolution, and each output pixel corresponds exactly to one pixel of the panel. The conversion to analogue, and its defects, disappear, an instance of the advantage of digital representation argued in Lecture 10.
 UNDERSTAND NOW: the video card.
 For the lecturer: RAMDAC: random access memory digital-analog converter. DVI could also carry analogue VGA signals for compatibility.</a:t>
             </a:r>
@@ -3358,7 +3358,7 @@
                 <a:ea typeface="Calibri" pitchFamily="34" charset="-122"/>
                 <a:cs typeface="Calibri" pitchFamily="34" charset="-120"/>
               </a:rPr>
-              <a:t>20-Computer_Architecture-Video_Card-Code.pptx</a:t>
+              <a:t>20-Computer_Architecture-Video_Card-Lab.pptx</a:t>
             </a:r>
             <a:endParaRPr lang="en-US" sz="1300" dirty="0"/>
           </a:p>

--- a/en/slides/20-Computer_Architecture-Video_Card.pptx
+++ b/en/slides/20-Computer_Architecture-Video_Card.pptx
@@ -126,26 +126,26 @@
   <p:extLst>
     <p:ext uri="{521415D9-36F7-43E2-AB2F-B90AF26B5E84}">
       <p14:sectionLst xmlns:p14="http://schemas.microsoft.com/office/powerpoint/2010/main">
-        <p14:section name="Opening" id="{548b342c-2aa3-3c1e-9e6b-8dbcf540b145}">
+        <p14:section name="Opening" id="{84341b3d-dc5b-faca-8e3a-464ff8e414a9}">
           <p14:sldIdLst>
             <p14:sldId id="256"/>
             <p14:sldId id="257"/>
           </p14:sldIdLst>
         </p14:section>
-        <p14:section name="Peripherals and controllers" id="{2fd2ee33-8a36-950c-9306-dd18a6f9b41f}">
+        <p14:section name="Peripherals and controllers" id="{73adec8a-d6fc-908e-aa64-6db4af997ca1}">
           <p14:sldIdLst>
             <p14:sldId id="258"/>
             <p14:sldId id="259"/>
           </p14:sldIdLst>
         </p14:section>
-        <p14:section name="Buses" id="{ec120b8b-7805-2332-b319-1c32b8caf59d}">
+        <p14:section name="Buses" id="{cc9adea0-e3bb-1b55-8e5f-d411a9d0c62b}">
           <p14:sldIdLst>
             <p14:sldId id="260"/>
             <p14:sldId id="261"/>
             <p14:sldId id="262"/>
           </p14:sldIdLst>
         </p14:section>
-        <p14:section name="The video card" id="{c5bae071-37bc-8687-0aa5-1e75779026a1}">
+        <p14:section name="The video card" id="{204a1da2-2507-dbaa-9640-452b0585d9a3}">
           <p14:sldIdLst>
             <p14:sldId id="263"/>
             <p14:sldId id="264"/>
@@ -156,7 +156,7 @@
             <p14:sldId id="269"/>
           </p14:sldIdLst>
         </p14:section>
-        <p14:section name="GPU and GPGPU" id="{403e7482-3627-6335-6e13-1887855b97e4}">
+        <p14:section name="GPU and GPGPU" id="{30351dd0-fe2e-5307-829f-ea482f3da15c}">
           <p14:sldIdLst>
             <p14:sldId id="270"/>
             <p14:sldId id="271"/>

--- a/en/slides/20-Computer_Architecture-Video_Card.pptx
+++ b/en/slides/20-Computer_Architecture-Video_Card.pptx
@@ -126,26 +126,26 @@
   <p:extLst>
     <p:ext uri="{521415D9-36F7-43E2-AB2F-B90AF26B5E84}">
       <p14:sectionLst xmlns:p14="http://schemas.microsoft.com/office/powerpoint/2010/main">
-        <p14:section name="Opening" id="{84341b3d-dc5b-faca-8e3a-464ff8e414a9}">
+        <p14:section name="Opening" id="{b3442993-74f7-92a6-9f0a-c6dc8f53404d}">
           <p14:sldIdLst>
             <p14:sldId id="256"/>
             <p14:sldId id="257"/>
           </p14:sldIdLst>
         </p14:section>
-        <p14:section name="Peripherals and controllers" id="{73adec8a-d6fc-908e-aa64-6db4af997ca1}">
+        <p14:section name="Peripherals and controllers" id="{bd82e8d0-648a-9bb9-5142-3de12543cd21}">
           <p14:sldIdLst>
             <p14:sldId id="258"/>
             <p14:sldId id="259"/>
           </p14:sldIdLst>
         </p14:section>
-        <p14:section name="Buses" id="{cc9adea0-e3bb-1b55-8e5f-d411a9d0c62b}">
+        <p14:section name="Buses" id="{629a6d30-5b57-37bf-a14d-5845eea951a5}">
           <p14:sldIdLst>
             <p14:sldId id="260"/>
             <p14:sldId id="261"/>
             <p14:sldId id="262"/>
           </p14:sldIdLst>
         </p14:section>
-        <p14:section name="The video card" id="{204a1da2-2507-dbaa-9640-452b0585d9a3}">
+        <p14:section name="The video card" id="{6c2b63c5-9f36-35d5-d747-275f019325c3}">
           <p14:sldIdLst>
             <p14:sldId id="263"/>
             <p14:sldId id="264"/>
@@ -156,7 +156,7 @@
             <p14:sldId id="269"/>
           </p14:sldIdLst>
         </p14:section>
-        <p14:section name="GPU and GPGPU" id="{30351dd0-fe2e-5307-829f-ea482f3da15c}">
+        <p14:section name="GPU and GPGPU" id="{baca0ee9-d43e-18cc-61f9-c4d6d093dfe9}">
           <p14:sldIdLst>
             <p14:sldId id="270"/>
             <p14:sldId id="271"/>
@@ -573,6 +573,7 @@
               <a:t>With this lecture the course leaves the processor and turns to its surroundings. The subject is the path of an image, from a number in memory to a point of light on the screen. Along the way two general ideas are encountered, the peripheral controller and the bus, together with one specific machine, the video card and its processor, the GPU. The kit has no video card at all, and for teaching purposes this is an advantage: every step that a card would conceal is performed by code that can be read, and its cost measured.
 Learning status: UNDERSTAND NOW, by the end of this lecture you explain it, trace it and apply it on your own; USE NOW, you follow and use the recipe today; how it works inside is explained later, or is not part of the course; UNDERSTAND LATER, recognise the name and what it is for; a later lecture explains it. A slide without a badge is context: a story, an example, a question, an exercise.
 Learning status of this lecture. UNDERSTAND NOW: the frame buffer; device controllers; buses and bandwidth; the video card; GPU and GPGPU. USE NOW: the complete program, the PRG32 tools (used, not studied, in this course). UNDERSTAND LATER: nothing. A slide without a badge is context: a story, an example, a question, an exercise.
+Roadmap. Today's outcomes: (1) explain why devices sit behind controllers and how the processor talks to them; (2) compute the size of a frame buffer and the bandwidth of a video signal; (3) describe what a video card and a GPU do. Builds on: only what Lecture 01 set up. Next: Lecture 21, Input and Output.
 For the lecturer: Spiral: one call draws one pixel on PRG32; the lecture follows that pixel from the frame buffer to the display, then generalises to buses, video cards, GPUs and GPGPU. The kit has no video card: its processor does everything, which makes every step visible.</a:t>
             </a:r>
             <a:endParaRPr lang="en-US" dirty="0"/>
@@ -1650,7 +1651,7 @@
             <a:r>
               <a:rPr lang="en-US" dirty="0"/>
               <a:t>Five conclusions. Input/output devices are a fundamental part of a computer. Each is managed by a controller that interfaces it to the bus. A bus is characterised by width, speed and transfer rate, and its bandwidth is a constraint that designs must respect. A video card displays graphics and text through a frame buffer, a resolution, a colour depth and an output interface. And its processors, the GPUs, are today used for high-performance computing. The next lecture covers the other input and output devices.
-Learning status, recap. UNDERSTAND NOW: the frame buffer; device controllers; buses and bandwidth; the video card; GPU and GPGPU. USE NOW: the complete program, the PRG32 tools (used, not studied, in this course). UNDERSTAND LATER: nothing. A slide without a badge is context: a story, an example, a question, an exercise.
+Learning status, recap. UNDERSTAND NOW: the frame buffer; device controllers; buses and bandwidth; the video card; GPU and GPGPU. USE NOW: the complete program, the PRG32 tools (used, not studied, in this course). UNDERSTAND LATER: nothing. A slide without a badge is context: a story, an example, a question, an exercise. Closing thread: Every rectangle drawn since Lecture 02 ended in a frame buffer that a controller sends to the screen many times a second. Next: the other devices: displays, keyboards, printers. Exit ticket (two to four minutes, alone, on paper): 1. Why is a device never connected directly to the processor? Say what its controller does and how the processor talks to it. 2. A screen of 320 x 200 pixels uses 16 bits per pixel and is redrawn 30 times per second. How much frame-buffer memory is needed, and how many bytes per second must reach the screen?
 For the lecturer: Next lecture: input and output devices.</a:t>
             </a:r>
             <a:endParaRPr lang="en-US" dirty="0"/>
